--- a/docs/pptx/carbo/ritu-carbo-linsubhr-ratio-grade2_10pct.pptx
+++ b/docs/pptx/carbo/ritu-carbo-linsubhr-ratio-grade2_10pct.pptx
@@ -2443,7 +2443,7 @@
           </p:nvSpPr>
           <p:spPr>
             <a:xfrm>
-              <a:off x="973953" y="2073503"/>
+              <a:off x="974732" y="2073503"/>
               <a:ext cx="0" cy="3649639"/>
             </a:xfrm>
             <a:custGeom>
@@ -2486,7 +2486,7 @@
           </p:nvSpPr>
           <p:spPr>
             <a:xfrm>
-              <a:off x="1881787" y="2073503"/>
+              <a:off x="1882345" y="2073503"/>
               <a:ext cx="0" cy="3649639"/>
             </a:xfrm>
             <a:custGeom>
@@ -2529,7 +2529,7 @@
           </p:nvSpPr>
           <p:spPr>
             <a:xfrm>
-              <a:off x="2789620" y="2073503"/>
+              <a:off x="2789957" y="2073503"/>
               <a:ext cx="0" cy="3649639"/>
             </a:xfrm>
             <a:custGeom>
@@ -2572,7 +2572,7 @@
           </p:nvSpPr>
           <p:spPr>
             <a:xfrm>
-              <a:off x="3697454" y="2073503"/>
+              <a:off x="3697570" y="2073503"/>
               <a:ext cx="0" cy="3649639"/>
             </a:xfrm>
             <a:custGeom>
@@ -2615,7 +2615,7 @@
           </p:nvSpPr>
           <p:spPr>
             <a:xfrm>
-              <a:off x="4605287" y="2073503"/>
+              <a:off x="4605182" y="2073503"/>
               <a:ext cx="0" cy="3649639"/>
             </a:xfrm>
             <a:custGeom>
@@ -2658,7 +2658,7 @@
           </p:nvSpPr>
           <p:spPr>
             <a:xfrm>
-              <a:off x="5513120" y="2073503"/>
+              <a:off x="5512795" y="2073503"/>
               <a:ext cx="0" cy="3649639"/>
             </a:xfrm>
             <a:custGeom>
@@ -2701,7 +2701,7 @@
           </p:nvSpPr>
           <p:spPr>
             <a:xfrm>
-              <a:off x="6420954" y="2073503"/>
+              <a:off x="6420407" y="2073503"/>
               <a:ext cx="0" cy="3649639"/>
             </a:xfrm>
             <a:custGeom>
@@ -2744,7 +2744,7 @@
           </p:nvSpPr>
           <p:spPr>
             <a:xfrm>
-              <a:off x="7328787" y="2073503"/>
+              <a:off x="7328020" y="2073503"/>
               <a:ext cx="0" cy="3649639"/>
             </a:xfrm>
             <a:custGeom>
@@ -2787,7 +2787,7 @@
           </p:nvSpPr>
           <p:spPr>
             <a:xfrm>
-              <a:off x="8236620" y="2073503"/>
+              <a:off x="8235632" y="2073503"/>
               <a:ext cx="0" cy="3649639"/>
             </a:xfrm>
             <a:custGeom>
@@ -3045,7 +3045,7 @@
           </p:nvSpPr>
           <p:spPr>
             <a:xfrm>
-              <a:off x="1427870" y="2073503"/>
+              <a:off x="1428538" y="2073503"/>
               <a:ext cx="0" cy="3649639"/>
             </a:xfrm>
             <a:custGeom>
@@ -3088,7 +3088,7 @@
           </p:nvSpPr>
           <p:spPr>
             <a:xfrm>
-              <a:off x="2335703" y="2073503"/>
+              <a:off x="2336151" y="2073503"/>
               <a:ext cx="0" cy="3649639"/>
             </a:xfrm>
             <a:custGeom>
@@ -3131,7 +3131,7 @@
           </p:nvSpPr>
           <p:spPr>
             <a:xfrm>
-              <a:off x="3243537" y="2073503"/>
+              <a:off x="3243764" y="2073503"/>
               <a:ext cx="0" cy="3649639"/>
             </a:xfrm>
             <a:custGeom>
@@ -3174,7 +3174,7 @@
           </p:nvSpPr>
           <p:spPr>
             <a:xfrm>
-              <a:off x="4151370" y="2073503"/>
+              <a:off x="4151376" y="2073503"/>
               <a:ext cx="0" cy="3649639"/>
             </a:xfrm>
             <a:custGeom>
@@ -3217,7 +3217,7 @@
           </p:nvSpPr>
           <p:spPr>
             <a:xfrm>
-              <a:off x="5059204" y="2073503"/>
+              <a:off x="5058989" y="2073503"/>
               <a:ext cx="0" cy="3649639"/>
             </a:xfrm>
             <a:custGeom>
@@ -3260,7 +3260,7 @@
           </p:nvSpPr>
           <p:spPr>
             <a:xfrm>
-              <a:off x="5967037" y="2073503"/>
+              <a:off x="5966601" y="2073503"/>
               <a:ext cx="0" cy="3649639"/>
             </a:xfrm>
             <a:custGeom>
@@ -3303,7 +3303,7 @@
           </p:nvSpPr>
           <p:spPr>
             <a:xfrm>
-              <a:off x="6874870" y="2073503"/>
+              <a:off x="6874214" y="2073503"/>
               <a:ext cx="0" cy="3649639"/>
             </a:xfrm>
             <a:custGeom>
@@ -3346,7 +3346,7 @@
           </p:nvSpPr>
           <p:spPr>
             <a:xfrm>
-              <a:off x="7782704" y="2073503"/>
+              <a:off x="7781826" y="2073503"/>
               <a:ext cx="0" cy="3649639"/>
             </a:xfrm>
             <a:custGeom>
@@ -3390,581 +3390,581 @@
           <p:spPr>
             <a:xfrm>
               <a:off x="1172049" y="2073503"/>
-              <a:ext cx="7090630" cy="3411663"/>
+              <a:ext cx="7090630" cy="3409081"/>
             </a:xfrm>
             <a:custGeom>
               <a:avLst/>
               <a:pathLst>
-                <a:path w="7090630" h="3411663">
+                <a:path w="7090630" h="3409081">
                   <a:moveTo>
-                    <a:pt x="727908" y="0"/>
+                    <a:pt x="732409" y="0"/>
                   </a:moveTo>
                   <a:lnTo>
-                    <a:pt x="787847" y="125402"/>
-                  </a:lnTo>
-                  <a:lnTo>
-                    <a:pt x="859470" y="268847"/>
-                  </a:lnTo>
-                  <a:lnTo>
-                    <a:pt x="931092" y="406166"/>
-                  </a:lnTo>
-                  <a:lnTo>
-                    <a:pt x="1002715" y="537619"/>
-                  </a:lnTo>
-                  <a:lnTo>
-                    <a:pt x="1074337" y="663457"/>
-                  </a:lnTo>
-                  <a:lnTo>
-                    <a:pt x="1145960" y="783920"/>
-                  </a:lnTo>
-                  <a:lnTo>
-                    <a:pt x="1217582" y="899238"/>
-                  </a:lnTo>
-                  <a:lnTo>
-                    <a:pt x="1289205" y="1009630"/>
-                  </a:lnTo>
-                  <a:lnTo>
-                    <a:pt x="1360827" y="1115307"/>
-                  </a:lnTo>
-                  <a:lnTo>
-                    <a:pt x="1432450" y="1216470"/>
-                  </a:lnTo>
-                  <a:lnTo>
-                    <a:pt x="1504073" y="1313313"/>
-                  </a:lnTo>
-                  <a:lnTo>
-                    <a:pt x="1575695" y="1406019"/>
-                  </a:lnTo>
-                  <a:lnTo>
-                    <a:pt x="1647318" y="1494765"/>
-                  </a:lnTo>
-                  <a:lnTo>
-                    <a:pt x="1718940" y="1579720"/>
-                  </a:lnTo>
-                  <a:lnTo>
-                    <a:pt x="1790563" y="1661047"/>
-                  </a:lnTo>
-                  <a:lnTo>
-                    <a:pt x="1862185" y="1738900"/>
-                  </a:lnTo>
-                  <a:lnTo>
-                    <a:pt x="1933808" y="1813428"/>
-                  </a:lnTo>
-                  <a:lnTo>
-                    <a:pt x="2005430" y="1884772"/>
-                  </a:lnTo>
-                  <a:lnTo>
-                    <a:pt x="2077053" y="1953069"/>
-                  </a:lnTo>
-                  <a:lnTo>
-                    <a:pt x="2148675" y="2018449"/>
-                  </a:lnTo>
-                  <a:lnTo>
-                    <a:pt x="2220298" y="2081037"/>
-                  </a:lnTo>
-                  <a:lnTo>
-                    <a:pt x="2291920" y="2140951"/>
-                  </a:lnTo>
-                  <a:lnTo>
-                    <a:pt x="2363543" y="2198306"/>
-                  </a:lnTo>
-                  <a:lnTo>
-                    <a:pt x="2435165" y="2253211"/>
-                  </a:lnTo>
-                  <a:lnTo>
-                    <a:pt x="2506788" y="2305771"/>
-                  </a:lnTo>
-                  <a:lnTo>
-                    <a:pt x="2578410" y="2356086"/>
-                  </a:lnTo>
-                  <a:lnTo>
-                    <a:pt x="2650033" y="2404251"/>
-                  </a:lnTo>
-                  <a:lnTo>
-                    <a:pt x="2721655" y="2450360"/>
-                  </a:lnTo>
-                  <a:lnTo>
-                    <a:pt x="2793278" y="2494499"/>
-                  </a:lnTo>
-                  <a:lnTo>
-                    <a:pt x="2864901" y="2536753"/>
-                  </a:lnTo>
-                  <a:lnTo>
-                    <a:pt x="2936523" y="2577202"/>
-                  </a:lnTo>
-                  <a:lnTo>
-                    <a:pt x="3008146" y="2615923"/>
-                  </a:lnTo>
-                  <a:lnTo>
-                    <a:pt x="3079768" y="2652991"/>
-                  </a:lnTo>
-                  <a:lnTo>
-                    <a:pt x="3151391" y="2665424"/>
-                  </a:lnTo>
-                  <a:lnTo>
-                    <a:pt x="3223013" y="2676819"/>
-                  </a:lnTo>
-                  <a:lnTo>
-                    <a:pt x="3294636" y="2688055"/>
-                  </a:lnTo>
-                  <a:lnTo>
-                    <a:pt x="3366258" y="2699135"/>
-                  </a:lnTo>
-                  <a:lnTo>
-                    <a:pt x="3437881" y="2710060"/>
-                  </a:lnTo>
-                  <a:lnTo>
-                    <a:pt x="3509503" y="2720833"/>
-                  </a:lnTo>
-                  <a:lnTo>
-                    <a:pt x="3581126" y="2731457"/>
-                  </a:lnTo>
-                  <a:lnTo>
-                    <a:pt x="3652748" y="2741932"/>
-                  </a:lnTo>
-                  <a:lnTo>
-                    <a:pt x="3724371" y="2752262"/>
-                  </a:lnTo>
-                  <a:lnTo>
-                    <a:pt x="3795993" y="2762447"/>
-                  </a:lnTo>
-                  <a:lnTo>
-                    <a:pt x="3867616" y="2772491"/>
-                  </a:lnTo>
-                  <a:lnTo>
-                    <a:pt x="3939238" y="2782395"/>
-                  </a:lnTo>
-                  <a:lnTo>
-                    <a:pt x="4010861" y="2792161"/>
-                  </a:lnTo>
-                  <a:lnTo>
-                    <a:pt x="4082483" y="2801791"/>
-                  </a:lnTo>
-                  <a:lnTo>
-                    <a:pt x="4154106" y="2811287"/>
-                  </a:lnTo>
-                  <a:lnTo>
-                    <a:pt x="4225729" y="2820651"/>
-                  </a:lnTo>
-                  <a:lnTo>
-                    <a:pt x="4297351" y="2829885"/>
-                  </a:lnTo>
-                  <a:lnTo>
-                    <a:pt x="4368974" y="2838989"/>
-                  </a:lnTo>
-                  <a:lnTo>
-                    <a:pt x="4440596" y="2847967"/>
-                  </a:lnTo>
-                  <a:lnTo>
-                    <a:pt x="4512219" y="2856820"/>
-                  </a:lnTo>
-                  <a:lnTo>
-                    <a:pt x="4583841" y="2865550"/>
-                  </a:lnTo>
-                  <a:lnTo>
-                    <a:pt x="4655464" y="2874158"/>
-                  </a:lnTo>
-                  <a:lnTo>
-                    <a:pt x="4727086" y="2882647"/>
-                  </a:lnTo>
-                  <a:lnTo>
-                    <a:pt x="4798709" y="2891017"/>
-                  </a:lnTo>
-                  <a:lnTo>
-                    <a:pt x="4870331" y="2899270"/>
-                  </a:lnTo>
-                  <a:lnTo>
-                    <a:pt x="4941954" y="2907409"/>
-                  </a:lnTo>
-                  <a:lnTo>
-                    <a:pt x="5013576" y="2915434"/>
-                  </a:lnTo>
-                  <a:lnTo>
-                    <a:pt x="5085199" y="2923348"/>
-                  </a:lnTo>
-                  <a:lnTo>
-                    <a:pt x="5156821" y="2931151"/>
-                  </a:lnTo>
-                  <a:lnTo>
-                    <a:pt x="5228444" y="2938846"/>
-                  </a:lnTo>
-                  <a:lnTo>
-                    <a:pt x="5300066" y="2946433"/>
-                  </a:lnTo>
-                  <a:lnTo>
-                    <a:pt x="5371689" y="2953915"/>
-                  </a:lnTo>
-                  <a:lnTo>
-                    <a:pt x="5443311" y="2961293"/>
-                  </a:lnTo>
-                  <a:lnTo>
-                    <a:pt x="5514934" y="2968568"/>
-                  </a:lnTo>
-                  <a:lnTo>
-                    <a:pt x="5586557" y="2975742"/>
-                  </a:lnTo>
-                  <a:lnTo>
-                    <a:pt x="5658179" y="2982816"/>
-                  </a:lnTo>
-                  <a:lnTo>
-                    <a:pt x="5729802" y="2989791"/>
-                  </a:lnTo>
-                  <a:lnTo>
-                    <a:pt x="5801424" y="2996669"/>
-                  </a:lnTo>
-                  <a:lnTo>
-                    <a:pt x="5873047" y="3003451"/>
-                  </a:lnTo>
-                  <a:lnTo>
-                    <a:pt x="5944669" y="3010139"/>
-                  </a:lnTo>
-                  <a:lnTo>
-                    <a:pt x="6016292" y="3016734"/>
-                  </a:lnTo>
-                  <a:lnTo>
-                    <a:pt x="6087914" y="3023237"/>
-                  </a:lnTo>
-                  <a:lnTo>
-                    <a:pt x="6159537" y="3029650"/>
-                  </a:lnTo>
-                  <a:lnTo>
-                    <a:pt x="6231159" y="3035973"/>
-                  </a:lnTo>
-                  <a:lnTo>
-                    <a:pt x="6302782" y="3042208"/>
-                  </a:lnTo>
-                  <a:lnTo>
-                    <a:pt x="6374404" y="3048356"/>
-                  </a:lnTo>
-                  <a:lnTo>
-                    <a:pt x="6446027" y="3054419"/>
-                  </a:lnTo>
-                  <a:lnTo>
-                    <a:pt x="6517649" y="3060397"/>
-                  </a:lnTo>
-                  <a:lnTo>
-                    <a:pt x="6589272" y="3066292"/>
-                  </a:lnTo>
-                  <a:lnTo>
-                    <a:pt x="6660894" y="3072105"/>
-                  </a:lnTo>
-                  <a:lnTo>
-                    <a:pt x="6732517" y="3077837"/>
-                  </a:lnTo>
-                  <a:lnTo>
-                    <a:pt x="6804139" y="3083489"/>
-                  </a:lnTo>
-                  <a:lnTo>
-                    <a:pt x="6875762" y="3089063"/>
-                  </a:lnTo>
-                  <a:lnTo>
-                    <a:pt x="6947385" y="3094558"/>
-                  </a:lnTo>
-                  <a:lnTo>
-                    <a:pt x="7019007" y="3099978"/>
-                  </a:lnTo>
-                  <a:lnTo>
-                    <a:pt x="7090630" y="3105322"/>
-                  </a:lnTo>
-                  <a:lnTo>
-                    <a:pt x="7090630" y="3411663"/>
-                  </a:lnTo>
-                  <a:lnTo>
-                    <a:pt x="7019007" y="3408447"/>
-                  </a:lnTo>
-                  <a:lnTo>
-                    <a:pt x="6947385" y="3405087"/>
-                  </a:lnTo>
-                  <a:lnTo>
-                    <a:pt x="6875762" y="3401578"/>
-                  </a:lnTo>
-                  <a:lnTo>
-                    <a:pt x="6804139" y="3397911"/>
-                  </a:lnTo>
-                  <a:lnTo>
-                    <a:pt x="6732517" y="3394082"/>
-                  </a:lnTo>
-                  <a:lnTo>
-                    <a:pt x="6660894" y="3390081"/>
-                  </a:lnTo>
-                  <a:lnTo>
-                    <a:pt x="6589272" y="3385902"/>
-                  </a:lnTo>
-                  <a:lnTo>
-                    <a:pt x="6517649" y="3381536"/>
-                  </a:lnTo>
-                  <a:lnTo>
-                    <a:pt x="6446027" y="3376975"/>
-                  </a:lnTo>
-                  <a:lnTo>
-                    <a:pt x="6374404" y="3372211"/>
-                  </a:lnTo>
-                  <a:lnTo>
-                    <a:pt x="6302782" y="3367235"/>
-                  </a:lnTo>
-                  <a:lnTo>
-                    <a:pt x="6231159" y="3362036"/>
-                  </a:lnTo>
-                  <a:lnTo>
-                    <a:pt x="6159537" y="3356606"/>
-                  </a:lnTo>
-                  <a:lnTo>
-                    <a:pt x="6087914" y="3350933"/>
-                  </a:lnTo>
-                  <a:lnTo>
-                    <a:pt x="6016292" y="3345007"/>
-                  </a:lnTo>
-                  <a:lnTo>
-                    <a:pt x="5944669" y="3338816"/>
-                  </a:lnTo>
-                  <a:lnTo>
-                    <a:pt x="5873047" y="3332350"/>
-                  </a:lnTo>
-                  <a:lnTo>
-                    <a:pt x="5801424" y="3325595"/>
-                  </a:lnTo>
-                  <a:lnTo>
-                    <a:pt x="5729802" y="3318538"/>
-                  </a:lnTo>
-                  <a:lnTo>
-                    <a:pt x="5658179" y="3311167"/>
-                  </a:lnTo>
-                  <a:lnTo>
-                    <a:pt x="5586557" y="3303466"/>
-                  </a:lnTo>
-                  <a:lnTo>
-                    <a:pt x="5514934" y="3295422"/>
-                  </a:lnTo>
-                  <a:lnTo>
-                    <a:pt x="5443311" y="3287020"/>
-                  </a:lnTo>
-                  <a:lnTo>
-                    <a:pt x="5371689" y="3278242"/>
-                  </a:lnTo>
-                  <a:lnTo>
-                    <a:pt x="5300066" y="3269072"/>
-                  </a:lnTo>
-                  <a:lnTo>
-                    <a:pt x="5228444" y="3259494"/>
-                  </a:lnTo>
-                  <a:lnTo>
-                    <a:pt x="5156821" y="3249488"/>
-                  </a:lnTo>
-                  <a:lnTo>
-                    <a:pt x="5085199" y="3239036"/>
-                  </a:lnTo>
-                  <a:lnTo>
-                    <a:pt x="5013576" y="3228117"/>
-                  </a:lnTo>
-                  <a:lnTo>
-                    <a:pt x="4941954" y="3216711"/>
-                  </a:lnTo>
-                  <a:lnTo>
-                    <a:pt x="4870331" y="3204796"/>
-                  </a:lnTo>
-                  <a:lnTo>
-                    <a:pt x="4798709" y="3192350"/>
-                  </a:lnTo>
-                  <a:lnTo>
-                    <a:pt x="4727086" y="3179348"/>
-                  </a:lnTo>
-                  <a:lnTo>
-                    <a:pt x="4655464" y="3165766"/>
-                  </a:lnTo>
-                  <a:lnTo>
-                    <a:pt x="4583841" y="3151578"/>
-                  </a:lnTo>
-                  <a:lnTo>
-                    <a:pt x="4512219" y="3136757"/>
-                  </a:lnTo>
-                  <a:lnTo>
-                    <a:pt x="4440596" y="3121275"/>
-                  </a:lnTo>
-                  <a:lnTo>
-                    <a:pt x="4368974" y="3105102"/>
-                  </a:lnTo>
-                  <a:lnTo>
-                    <a:pt x="4297351" y="3088207"/>
-                  </a:lnTo>
-                  <a:lnTo>
-                    <a:pt x="4225729" y="3070559"/>
-                  </a:lnTo>
-                  <a:lnTo>
-                    <a:pt x="4154106" y="3052123"/>
-                  </a:lnTo>
-                  <a:lnTo>
-                    <a:pt x="4082483" y="3032864"/>
-                  </a:lnTo>
-                  <a:lnTo>
-                    <a:pt x="4010861" y="3012746"/>
-                  </a:lnTo>
-                  <a:lnTo>
-                    <a:pt x="3939238" y="2991731"/>
-                  </a:lnTo>
-                  <a:lnTo>
-                    <a:pt x="3867616" y="2969778"/>
-                  </a:lnTo>
-                  <a:lnTo>
-                    <a:pt x="3795993" y="2946845"/>
-                  </a:lnTo>
-                  <a:lnTo>
-                    <a:pt x="3724371" y="2922889"/>
-                  </a:lnTo>
-                  <a:lnTo>
-                    <a:pt x="3652748" y="2897864"/>
-                  </a:lnTo>
-                  <a:lnTo>
-                    <a:pt x="3581126" y="2871723"/>
-                  </a:lnTo>
-                  <a:lnTo>
-                    <a:pt x="3509503" y="2844415"/>
-                  </a:lnTo>
-                  <a:lnTo>
-                    <a:pt x="3437881" y="2815889"/>
-                  </a:lnTo>
-                  <a:lnTo>
-                    <a:pt x="3366258" y="2786089"/>
-                  </a:lnTo>
-                  <a:lnTo>
-                    <a:pt x="3294636" y="2754961"/>
-                  </a:lnTo>
-                  <a:lnTo>
-                    <a:pt x="3223013" y="2722443"/>
-                  </a:lnTo>
-                  <a:lnTo>
-                    <a:pt x="3151391" y="2688475"/>
-                  </a:lnTo>
-                  <a:lnTo>
-                    <a:pt x="3079768" y="2653868"/>
-                  </a:lnTo>
-                  <a:lnTo>
-                    <a:pt x="3008146" y="2642149"/>
-                  </a:lnTo>
-                  <a:lnTo>
-                    <a:pt x="2936523" y="2630265"/>
-                  </a:lnTo>
-                  <a:lnTo>
-                    <a:pt x="2864901" y="2618212"/>
-                  </a:lnTo>
-                  <a:lnTo>
-                    <a:pt x="2793278" y="2605990"/>
-                  </a:lnTo>
-                  <a:lnTo>
-                    <a:pt x="2721655" y="2593595"/>
-                  </a:lnTo>
-                  <a:lnTo>
-                    <a:pt x="2650033" y="2581025"/>
-                  </a:lnTo>
-                  <a:lnTo>
-                    <a:pt x="2578410" y="2568277"/>
-                  </a:lnTo>
-                  <a:lnTo>
-                    <a:pt x="2506788" y="2555349"/>
-                  </a:lnTo>
-                  <a:lnTo>
-                    <a:pt x="2435165" y="2542239"/>
-                  </a:lnTo>
-                  <a:lnTo>
-                    <a:pt x="2363543" y="2528944"/>
-                  </a:lnTo>
-                  <a:lnTo>
-                    <a:pt x="2291920" y="2515461"/>
-                  </a:lnTo>
-                  <a:lnTo>
-                    <a:pt x="2220298" y="2501787"/>
-                  </a:lnTo>
-                  <a:lnTo>
-                    <a:pt x="2148675" y="2487921"/>
-                  </a:lnTo>
-                  <a:lnTo>
-                    <a:pt x="2077053" y="2473858"/>
-                  </a:lnTo>
-                  <a:lnTo>
-                    <a:pt x="2005430" y="2459597"/>
-                  </a:lnTo>
-                  <a:lnTo>
-                    <a:pt x="1933808" y="2445135"/>
-                  </a:lnTo>
-                  <a:lnTo>
-                    <a:pt x="1862185" y="2430469"/>
-                  </a:lnTo>
-                  <a:lnTo>
-                    <a:pt x="1790563" y="2415595"/>
-                  </a:lnTo>
-                  <a:lnTo>
-                    <a:pt x="1718940" y="2400511"/>
-                  </a:lnTo>
-                  <a:lnTo>
-                    <a:pt x="1647318" y="2385214"/>
-                  </a:lnTo>
-                  <a:lnTo>
-                    <a:pt x="1575695" y="2369702"/>
-                  </a:lnTo>
-                  <a:lnTo>
-                    <a:pt x="1504073" y="2353970"/>
-                  </a:lnTo>
-                  <a:lnTo>
-                    <a:pt x="1432450" y="2338016"/>
-                  </a:lnTo>
-                  <a:lnTo>
-                    <a:pt x="1360827" y="2321837"/>
-                  </a:lnTo>
-                  <a:lnTo>
-                    <a:pt x="1289205" y="2305429"/>
-                  </a:lnTo>
-                  <a:lnTo>
-                    <a:pt x="1217582" y="2288790"/>
-                  </a:lnTo>
-                  <a:lnTo>
-                    <a:pt x="1145960" y="2271915"/>
-                  </a:lnTo>
-                  <a:lnTo>
-                    <a:pt x="1074337" y="2254803"/>
-                  </a:lnTo>
-                  <a:lnTo>
-                    <a:pt x="1002715" y="2237448"/>
-                  </a:lnTo>
-                  <a:lnTo>
-                    <a:pt x="931092" y="2219849"/>
-                  </a:lnTo>
-                  <a:lnTo>
-                    <a:pt x="859470" y="2202001"/>
-                  </a:lnTo>
-                  <a:lnTo>
-                    <a:pt x="787847" y="2183901"/>
-                  </a:lnTo>
-                  <a:lnTo>
-                    <a:pt x="716225" y="2165546"/>
-                  </a:lnTo>
-                  <a:lnTo>
-                    <a:pt x="644602" y="2146931"/>
-                  </a:lnTo>
-                  <a:lnTo>
-                    <a:pt x="572980" y="2128053"/>
-                  </a:lnTo>
-                  <a:lnTo>
-                    <a:pt x="501357" y="2108909"/>
-                  </a:lnTo>
-                  <a:lnTo>
-                    <a:pt x="429735" y="2089495"/>
-                  </a:lnTo>
-                  <a:lnTo>
-                    <a:pt x="358112" y="2069806"/>
-                  </a:lnTo>
-                  <a:lnTo>
-                    <a:pt x="286490" y="2049839"/>
-                  </a:lnTo>
-                  <a:lnTo>
-                    <a:pt x="214867" y="2029591"/>
-                  </a:lnTo>
-                  <a:lnTo>
-                    <a:pt x="143245" y="2009056"/>
-                  </a:lnTo>
-                  <a:lnTo>
-                    <a:pt x="71622" y="1988232"/>
-                  </a:lnTo>
-                  <a:lnTo>
-                    <a:pt x="0" y="1967113"/>
+                    <a:pt x="787847" y="115337"/>
+                  </a:lnTo>
+                  <a:lnTo>
+                    <a:pt x="859470" y="258032"/>
+                  </a:lnTo>
+                  <a:lnTo>
+                    <a:pt x="931092" y="394682"/>
+                  </a:lnTo>
+                  <a:lnTo>
+                    <a:pt x="1002715" y="525543"/>
+                  </a:lnTo>
+                  <a:lnTo>
+                    <a:pt x="1074337" y="650860"/>
+                  </a:lnTo>
+                  <a:lnTo>
+                    <a:pt x="1145960" y="770869"/>
+                  </a:lnTo>
+                  <a:lnTo>
+                    <a:pt x="1217582" y="885793"/>
+                  </a:lnTo>
+                  <a:lnTo>
+                    <a:pt x="1289205" y="995850"/>
+                  </a:lnTo>
+                  <a:lnTo>
+                    <a:pt x="1360827" y="1101244"/>
+                  </a:lnTo>
+                  <a:lnTo>
+                    <a:pt x="1432450" y="1202173"/>
+                  </a:lnTo>
+                  <a:lnTo>
+                    <a:pt x="1504073" y="1298826"/>
+                  </a:lnTo>
+                  <a:lnTo>
+                    <a:pt x="1575695" y="1391385"/>
+                  </a:lnTo>
+                  <a:lnTo>
+                    <a:pt x="1647318" y="1480023"/>
+                  </a:lnTo>
+                  <a:lnTo>
+                    <a:pt x="1718940" y="1564906"/>
+                  </a:lnTo>
+                  <a:lnTo>
+                    <a:pt x="1790563" y="1646194"/>
+                  </a:lnTo>
+                  <a:lnTo>
+                    <a:pt x="1862185" y="1724037"/>
+                  </a:lnTo>
+                  <a:lnTo>
+                    <a:pt x="1933808" y="1798583"/>
+                  </a:lnTo>
+                  <a:lnTo>
+                    <a:pt x="2005430" y="1869971"/>
+                  </a:lnTo>
+                  <a:lnTo>
+                    <a:pt x="2077053" y="1938335"/>
+                  </a:lnTo>
+                  <a:lnTo>
+                    <a:pt x="2148675" y="2003803"/>
+                  </a:lnTo>
+                  <a:lnTo>
+                    <a:pt x="2220298" y="2066497"/>
+                  </a:lnTo>
+                  <a:lnTo>
+                    <a:pt x="2291920" y="2126536"/>
+                  </a:lnTo>
+                  <a:lnTo>
+                    <a:pt x="2363543" y="2184031"/>
+                  </a:lnTo>
+                  <a:lnTo>
+                    <a:pt x="2435165" y="2239090"/>
+                  </a:lnTo>
+                  <a:lnTo>
+                    <a:pt x="2506788" y="2291817"/>
+                  </a:lnTo>
+                  <a:lnTo>
+                    <a:pt x="2578410" y="2342310"/>
+                  </a:lnTo>
+                  <a:lnTo>
+                    <a:pt x="2650033" y="2390665"/>
+                  </a:lnTo>
+                  <a:lnTo>
+                    <a:pt x="2721655" y="2436971"/>
+                  </a:lnTo>
+                  <a:lnTo>
+                    <a:pt x="2793278" y="2481315"/>
+                  </a:lnTo>
+                  <a:lnTo>
+                    <a:pt x="2864901" y="2523780"/>
+                  </a:lnTo>
+                  <a:lnTo>
+                    <a:pt x="2936523" y="2564447"/>
+                  </a:lnTo>
+                  <a:lnTo>
+                    <a:pt x="3008146" y="2603391"/>
+                  </a:lnTo>
+                  <a:lnTo>
+                    <a:pt x="3079768" y="2640685"/>
+                  </a:lnTo>
+                  <a:lnTo>
+                    <a:pt x="3151391" y="2661367"/>
+                  </a:lnTo>
+                  <a:lnTo>
+                    <a:pt x="3223013" y="2672587"/>
+                  </a:lnTo>
+                  <a:lnTo>
+                    <a:pt x="3294636" y="2683655"/>
+                  </a:lnTo>
+                  <a:lnTo>
+                    <a:pt x="3366258" y="2694571"/>
+                  </a:lnTo>
+                  <a:lnTo>
+                    <a:pt x="3437881" y="2705339"/>
+                  </a:lnTo>
+                  <a:lnTo>
+                    <a:pt x="3509503" y="2715959"/>
+                  </a:lnTo>
+                  <a:lnTo>
+                    <a:pt x="3581126" y="2726435"/>
+                  </a:lnTo>
+                  <a:lnTo>
+                    <a:pt x="3652748" y="2736767"/>
+                  </a:lnTo>
+                  <a:lnTo>
+                    <a:pt x="3724371" y="2746959"/>
+                  </a:lnTo>
+                  <a:lnTo>
+                    <a:pt x="3795993" y="2757012"/>
+                  </a:lnTo>
+                  <a:lnTo>
+                    <a:pt x="3867616" y="2766927"/>
+                  </a:lnTo>
+                  <a:lnTo>
+                    <a:pt x="3939238" y="2776707"/>
+                  </a:lnTo>
+                  <a:lnTo>
+                    <a:pt x="4010861" y="2786354"/>
+                  </a:lnTo>
+                  <a:lnTo>
+                    <a:pt x="4082483" y="2795869"/>
+                  </a:lnTo>
+                  <a:lnTo>
+                    <a:pt x="4154106" y="2805255"/>
+                  </a:lnTo>
+                  <a:lnTo>
+                    <a:pt x="4225729" y="2814512"/>
+                  </a:lnTo>
+                  <a:lnTo>
+                    <a:pt x="4297351" y="2823643"/>
+                  </a:lnTo>
+                  <a:lnTo>
+                    <a:pt x="4368974" y="2832649"/>
+                  </a:lnTo>
+                  <a:lnTo>
+                    <a:pt x="4440596" y="2841533"/>
+                  </a:lnTo>
+                  <a:lnTo>
+                    <a:pt x="4512219" y="2850295"/>
+                  </a:lnTo>
+                  <a:lnTo>
+                    <a:pt x="4583841" y="2858938"/>
+                  </a:lnTo>
+                  <a:lnTo>
+                    <a:pt x="4655464" y="2867463"/>
+                  </a:lnTo>
+                  <a:lnTo>
+                    <a:pt x="4727086" y="2875871"/>
+                  </a:lnTo>
+                  <a:lnTo>
+                    <a:pt x="4798709" y="2884165"/>
+                  </a:lnTo>
+                  <a:lnTo>
+                    <a:pt x="4870331" y="2892346"/>
+                  </a:lnTo>
+                  <a:lnTo>
+                    <a:pt x="4941954" y="2900415"/>
+                  </a:lnTo>
+                  <a:lnTo>
+                    <a:pt x="5013576" y="2908374"/>
+                  </a:lnTo>
+                  <a:lnTo>
+                    <a:pt x="5085199" y="2916224"/>
+                  </a:lnTo>
+                  <a:lnTo>
+                    <a:pt x="5156821" y="2923967"/>
+                  </a:lnTo>
+                  <a:lnTo>
+                    <a:pt x="5228444" y="2931605"/>
+                  </a:lnTo>
+                  <a:lnTo>
+                    <a:pt x="5300066" y="2939138"/>
+                  </a:lnTo>
+                  <a:lnTo>
+                    <a:pt x="5371689" y="2946569"/>
+                  </a:lnTo>
+                  <a:lnTo>
+                    <a:pt x="5443311" y="2953898"/>
+                  </a:lnTo>
+                  <a:lnTo>
+                    <a:pt x="5514934" y="2961127"/>
+                  </a:lnTo>
+                  <a:lnTo>
+                    <a:pt x="5586557" y="2968258"/>
+                  </a:lnTo>
+                  <a:lnTo>
+                    <a:pt x="5658179" y="2975291"/>
+                  </a:lnTo>
+                  <a:lnTo>
+                    <a:pt x="5729802" y="2982228"/>
+                  </a:lnTo>
+                  <a:lnTo>
+                    <a:pt x="5801424" y="2989071"/>
+                  </a:lnTo>
+                  <a:lnTo>
+                    <a:pt x="5873047" y="2995820"/>
+                  </a:lnTo>
+                  <a:lnTo>
+                    <a:pt x="5944669" y="3002477"/>
+                  </a:lnTo>
+                  <a:lnTo>
+                    <a:pt x="6016292" y="3009044"/>
+                  </a:lnTo>
+                  <a:lnTo>
+                    <a:pt x="6087914" y="3015521"/>
+                  </a:lnTo>
+                  <a:lnTo>
+                    <a:pt x="6159537" y="3021909"/>
+                  </a:lnTo>
+                  <a:lnTo>
+                    <a:pt x="6231159" y="3028210"/>
+                  </a:lnTo>
+                  <a:lnTo>
+                    <a:pt x="6302782" y="3034426"/>
+                  </a:lnTo>
+                  <a:lnTo>
+                    <a:pt x="6374404" y="3040556"/>
+                  </a:lnTo>
+                  <a:lnTo>
+                    <a:pt x="6446027" y="3046603"/>
+                  </a:lnTo>
+                  <a:lnTo>
+                    <a:pt x="6517649" y="3052567"/>
+                  </a:lnTo>
+                  <a:lnTo>
+                    <a:pt x="6589272" y="3058450"/>
+                  </a:lnTo>
+                  <a:lnTo>
+                    <a:pt x="6660894" y="3064253"/>
+                  </a:lnTo>
+                  <a:lnTo>
+                    <a:pt x="6732517" y="3069976"/>
+                  </a:lnTo>
+                  <a:lnTo>
+                    <a:pt x="6804139" y="3075622"/>
+                  </a:lnTo>
+                  <a:lnTo>
+                    <a:pt x="6875762" y="3081190"/>
+                  </a:lnTo>
+                  <a:lnTo>
+                    <a:pt x="6947385" y="3086683"/>
+                  </a:lnTo>
+                  <a:lnTo>
+                    <a:pt x="7019007" y="3092100"/>
+                  </a:lnTo>
+                  <a:lnTo>
+                    <a:pt x="7090630" y="3097444"/>
+                  </a:lnTo>
+                  <a:lnTo>
+                    <a:pt x="7090630" y="3409081"/>
+                  </a:lnTo>
+                  <a:lnTo>
+                    <a:pt x="7019007" y="3405778"/>
+                  </a:lnTo>
+                  <a:lnTo>
+                    <a:pt x="6947385" y="3402329"/>
+                  </a:lnTo>
+                  <a:lnTo>
+                    <a:pt x="6875762" y="3398727"/>
+                  </a:lnTo>
+                  <a:lnTo>
+                    <a:pt x="6804139" y="3394967"/>
+                  </a:lnTo>
+                  <a:lnTo>
+                    <a:pt x="6732517" y="3391039"/>
+                  </a:lnTo>
+                  <a:lnTo>
+                    <a:pt x="6660894" y="3386938"/>
+                  </a:lnTo>
+                  <a:lnTo>
+                    <a:pt x="6589272" y="3382656"/>
+                  </a:lnTo>
+                  <a:lnTo>
+                    <a:pt x="6517649" y="3378184"/>
+                  </a:lnTo>
+                  <a:lnTo>
+                    <a:pt x="6446027" y="3373514"/>
+                  </a:lnTo>
+                  <a:lnTo>
+                    <a:pt x="6374404" y="3368638"/>
+                  </a:lnTo>
+                  <a:lnTo>
+                    <a:pt x="6302782" y="3363546"/>
+                  </a:lnTo>
+                  <a:lnTo>
+                    <a:pt x="6231159" y="3358228"/>
+                  </a:lnTo>
+                  <a:lnTo>
+                    <a:pt x="6159537" y="3352676"/>
+                  </a:lnTo>
+                  <a:lnTo>
+                    <a:pt x="6087914" y="3346878"/>
+                  </a:lnTo>
+                  <a:lnTo>
+                    <a:pt x="6016292" y="3340823"/>
+                  </a:lnTo>
+                  <a:lnTo>
+                    <a:pt x="5944669" y="3334501"/>
+                  </a:lnTo>
+                  <a:lnTo>
+                    <a:pt x="5873047" y="3327899"/>
+                  </a:lnTo>
+                  <a:lnTo>
+                    <a:pt x="5801424" y="3321004"/>
+                  </a:lnTo>
+                  <a:lnTo>
+                    <a:pt x="5729802" y="3313805"/>
+                  </a:lnTo>
+                  <a:lnTo>
+                    <a:pt x="5658179" y="3306288"/>
+                  </a:lnTo>
+                  <a:lnTo>
+                    <a:pt x="5586557" y="3298437"/>
+                  </a:lnTo>
+                  <a:lnTo>
+                    <a:pt x="5514934" y="3290240"/>
+                  </a:lnTo>
+                  <a:lnTo>
+                    <a:pt x="5443311" y="3281680"/>
+                  </a:lnTo>
+                  <a:lnTo>
+                    <a:pt x="5371689" y="3272741"/>
+                  </a:lnTo>
+                  <a:lnTo>
+                    <a:pt x="5300066" y="3263407"/>
+                  </a:lnTo>
+                  <a:lnTo>
+                    <a:pt x="5228444" y="3253660"/>
+                  </a:lnTo>
+                  <a:lnTo>
+                    <a:pt x="5156821" y="3243482"/>
+                  </a:lnTo>
+                  <a:lnTo>
+                    <a:pt x="5085199" y="3232853"/>
+                  </a:lnTo>
+                  <a:lnTo>
+                    <a:pt x="5013576" y="3221754"/>
+                  </a:lnTo>
+                  <a:lnTo>
+                    <a:pt x="4941954" y="3210165"/>
+                  </a:lnTo>
+                  <a:lnTo>
+                    <a:pt x="4870331" y="3198063"/>
+                  </a:lnTo>
+                  <a:lnTo>
+                    <a:pt x="4798709" y="3185425"/>
+                  </a:lnTo>
+                  <a:lnTo>
+                    <a:pt x="4727086" y="3172228"/>
+                  </a:lnTo>
+                  <a:lnTo>
+                    <a:pt x="4655464" y="3158448"/>
+                  </a:lnTo>
+                  <a:lnTo>
+                    <a:pt x="4583841" y="3144057"/>
+                  </a:lnTo>
+                  <a:lnTo>
+                    <a:pt x="4512219" y="3129031"/>
+                  </a:lnTo>
+                  <a:lnTo>
+                    <a:pt x="4440596" y="3113339"/>
+                  </a:lnTo>
+                  <a:lnTo>
+                    <a:pt x="4368974" y="3096954"/>
+                  </a:lnTo>
+                  <a:lnTo>
+                    <a:pt x="4297351" y="3079843"/>
+                  </a:lnTo>
+                  <a:lnTo>
+                    <a:pt x="4225729" y="3061976"/>
+                  </a:lnTo>
+                  <a:lnTo>
+                    <a:pt x="4154106" y="3043318"/>
+                  </a:lnTo>
+                  <a:lnTo>
+                    <a:pt x="4082483" y="3023835"/>
+                  </a:lnTo>
+                  <a:lnTo>
+                    <a:pt x="4010861" y="3003490"/>
+                  </a:lnTo>
+                  <a:lnTo>
+                    <a:pt x="3939238" y="2982245"/>
+                  </a:lnTo>
+                  <a:lnTo>
+                    <a:pt x="3867616" y="2960061"/>
+                  </a:lnTo>
+                  <a:lnTo>
+                    <a:pt x="3795993" y="2936894"/>
+                  </a:lnTo>
+                  <a:lnTo>
+                    <a:pt x="3724371" y="2912704"/>
+                  </a:lnTo>
+                  <a:lnTo>
+                    <a:pt x="3652748" y="2887443"/>
+                  </a:lnTo>
+                  <a:lnTo>
+                    <a:pt x="3581126" y="2861064"/>
+                  </a:lnTo>
+                  <a:lnTo>
+                    <a:pt x="3509503" y="2833519"/>
+                  </a:lnTo>
+                  <a:lnTo>
+                    <a:pt x="3437881" y="2804755"/>
+                  </a:lnTo>
+                  <a:lnTo>
+                    <a:pt x="3366258" y="2774719"/>
+                  </a:lnTo>
+                  <a:lnTo>
+                    <a:pt x="3294636" y="2743353"/>
+                  </a:lnTo>
+                  <a:lnTo>
+                    <a:pt x="3223013" y="2710601"/>
+                  </a:lnTo>
+                  <a:lnTo>
+                    <a:pt x="3151391" y="2676400"/>
+                  </a:lnTo>
+                  <a:lnTo>
+                    <a:pt x="3079768" y="2649991"/>
+                  </a:lnTo>
+                  <a:lnTo>
+                    <a:pt x="3008146" y="2638458"/>
+                  </a:lnTo>
+                  <a:lnTo>
+                    <a:pt x="2936523" y="2626766"/>
+                  </a:lnTo>
+                  <a:lnTo>
+                    <a:pt x="2864901" y="2614911"/>
+                  </a:lnTo>
+                  <a:lnTo>
+                    <a:pt x="2793278" y="2602893"/>
+                  </a:lnTo>
+                  <a:lnTo>
+                    <a:pt x="2721655" y="2590709"/>
+                  </a:lnTo>
+                  <a:lnTo>
+                    <a:pt x="2650033" y="2578356"/>
+                  </a:lnTo>
+                  <a:lnTo>
+                    <a:pt x="2578410" y="2565832"/>
+                  </a:lnTo>
+                  <a:lnTo>
+                    <a:pt x="2506788" y="2553134"/>
+                  </a:lnTo>
+                  <a:lnTo>
+                    <a:pt x="2435165" y="2540262"/>
+                  </a:lnTo>
+                  <a:lnTo>
+                    <a:pt x="2363543" y="2527211"/>
+                  </a:lnTo>
+                  <a:lnTo>
+                    <a:pt x="2291920" y="2513979"/>
+                  </a:lnTo>
+                  <a:lnTo>
+                    <a:pt x="2220298" y="2500565"/>
+                  </a:lnTo>
+                  <a:lnTo>
+                    <a:pt x="2148675" y="2486965"/>
+                  </a:lnTo>
+                  <a:lnTo>
+                    <a:pt x="2077053" y="2473177"/>
+                  </a:lnTo>
+                  <a:lnTo>
+                    <a:pt x="2005430" y="2459198"/>
+                  </a:lnTo>
+                  <a:lnTo>
+                    <a:pt x="1933808" y="2445026"/>
+                  </a:lnTo>
+                  <a:lnTo>
+                    <a:pt x="1862185" y="2430658"/>
+                  </a:lnTo>
+                  <a:lnTo>
+                    <a:pt x="1790563" y="2416091"/>
+                  </a:lnTo>
+                  <a:lnTo>
+                    <a:pt x="1718940" y="2401322"/>
+                  </a:lnTo>
+                  <a:lnTo>
+                    <a:pt x="1647318" y="2386349"/>
+                  </a:lnTo>
+                  <a:lnTo>
+                    <a:pt x="1575695" y="2371169"/>
+                  </a:lnTo>
+                  <a:lnTo>
+                    <a:pt x="1504073" y="2355780"/>
+                  </a:lnTo>
+                  <a:lnTo>
+                    <a:pt x="1432450" y="2340177"/>
+                  </a:lnTo>
+                  <a:lnTo>
+                    <a:pt x="1360827" y="2324358"/>
+                  </a:lnTo>
+                  <a:lnTo>
+                    <a:pt x="1289205" y="2308321"/>
+                  </a:lnTo>
+                  <a:lnTo>
+                    <a:pt x="1217582" y="2292062"/>
+                  </a:lnTo>
+                  <a:lnTo>
+                    <a:pt x="1145960" y="2275577"/>
+                  </a:lnTo>
+                  <a:lnTo>
+                    <a:pt x="1074337" y="2258865"/>
+                  </a:lnTo>
+                  <a:lnTo>
+                    <a:pt x="1002715" y="2241922"/>
+                  </a:lnTo>
+                  <a:lnTo>
+                    <a:pt x="931092" y="2224744"/>
+                  </a:lnTo>
+                  <a:lnTo>
+                    <a:pt x="859470" y="2207329"/>
+                  </a:lnTo>
+                  <a:lnTo>
+                    <a:pt x="787847" y="2189673"/>
+                  </a:lnTo>
+                  <a:lnTo>
+                    <a:pt x="716225" y="2171772"/>
+                  </a:lnTo>
+                  <a:lnTo>
+                    <a:pt x="644602" y="2153624"/>
+                  </a:lnTo>
+                  <a:lnTo>
+                    <a:pt x="572980" y="2135225"/>
+                  </a:lnTo>
+                  <a:lnTo>
+                    <a:pt x="501357" y="2116572"/>
+                  </a:lnTo>
+                  <a:lnTo>
+                    <a:pt x="429735" y="2097660"/>
+                  </a:lnTo>
+                  <a:lnTo>
+                    <a:pt x="358112" y="2078487"/>
+                  </a:lnTo>
+                  <a:lnTo>
+                    <a:pt x="286490" y="2059048"/>
+                  </a:lnTo>
+                  <a:lnTo>
+                    <a:pt x="214867" y="2039341"/>
+                  </a:lnTo>
+                  <a:lnTo>
+                    <a:pt x="143245" y="2019361"/>
+                  </a:lnTo>
+                  <a:lnTo>
+                    <a:pt x="71622" y="1999105"/>
+                  </a:lnTo>
+                  <a:lnTo>
+                    <a:pt x="0" y="1978568"/>
                   </a:lnTo>
                   <a:close/>
                 </a:path>
@@ -3990,282 +3990,282 @@
           </p:nvSpPr>
           <p:spPr>
             <a:xfrm>
-              <a:off x="1899957" y="2073503"/>
-              <a:ext cx="6362721" cy="3105322"/>
+              <a:off x="1904458" y="2073503"/>
+              <a:ext cx="6358221" cy="3097444"/>
             </a:xfrm>
             <a:custGeom>
               <a:avLst/>
               <a:pathLst>
-                <a:path w="6362721" h="3105322">
+                <a:path w="6358221" h="3097444">
                   <a:moveTo>
                     <a:pt x="0" y="0"/>
                   </a:moveTo>
                   <a:lnTo>
-                    <a:pt x="59939" y="125402"/>
-                  </a:lnTo>
-                  <a:lnTo>
-                    <a:pt x="131561" y="268847"/>
-                  </a:lnTo>
-                  <a:lnTo>
-                    <a:pt x="203184" y="406166"/>
-                  </a:lnTo>
-                  <a:lnTo>
-                    <a:pt x="274807" y="537619"/>
-                  </a:lnTo>
-                  <a:lnTo>
-                    <a:pt x="346429" y="663457"/>
-                  </a:lnTo>
-                  <a:lnTo>
-                    <a:pt x="418052" y="783920"/>
-                  </a:lnTo>
-                  <a:lnTo>
-                    <a:pt x="489674" y="899238"/>
-                  </a:lnTo>
-                  <a:lnTo>
-                    <a:pt x="561297" y="1009630"/>
-                  </a:lnTo>
-                  <a:lnTo>
-                    <a:pt x="632919" y="1115307"/>
-                  </a:lnTo>
-                  <a:lnTo>
-                    <a:pt x="704542" y="1216470"/>
-                  </a:lnTo>
-                  <a:lnTo>
-                    <a:pt x="776164" y="1313313"/>
-                  </a:lnTo>
-                  <a:lnTo>
-                    <a:pt x="847787" y="1406019"/>
-                  </a:lnTo>
-                  <a:lnTo>
-                    <a:pt x="919409" y="1494765"/>
-                  </a:lnTo>
-                  <a:lnTo>
-                    <a:pt x="991032" y="1579720"/>
-                  </a:lnTo>
-                  <a:lnTo>
-                    <a:pt x="1062654" y="1661047"/>
-                  </a:lnTo>
-                  <a:lnTo>
-                    <a:pt x="1134277" y="1738900"/>
-                  </a:lnTo>
-                  <a:lnTo>
-                    <a:pt x="1205899" y="1813428"/>
-                  </a:lnTo>
-                  <a:lnTo>
-                    <a:pt x="1277522" y="1884772"/>
-                  </a:lnTo>
-                  <a:lnTo>
-                    <a:pt x="1349144" y="1953069"/>
-                  </a:lnTo>
-                  <a:lnTo>
-                    <a:pt x="1420767" y="2018449"/>
-                  </a:lnTo>
-                  <a:lnTo>
-                    <a:pt x="1492389" y="2081037"/>
-                  </a:lnTo>
-                  <a:lnTo>
-                    <a:pt x="1564012" y="2140951"/>
-                  </a:lnTo>
-                  <a:lnTo>
-                    <a:pt x="1635635" y="2198306"/>
-                  </a:lnTo>
-                  <a:lnTo>
-                    <a:pt x="1707257" y="2253211"/>
-                  </a:lnTo>
-                  <a:lnTo>
-                    <a:pt x="1778880" y="2305771"/>
-                  </a:lnTo>
-                  <a:lnTo>
-                    <a:pt x="1850502" y="2356086"/>
-                  </a:lnTo>
-                  <a:lnTo>
-                    <a:pt x="1922125" y="2404251"/>
-                  </a:lnTo>
-                  <a:lnTo>
-                    <a:pt x="1993747" y="2450360"/>
-                  </a:lnTo>
-                  <a:lnTo>
-                    <a:pt x="2065370" y="2494499"/>
-                  </a:lnTo>
-                  <a:lnTo>
-                    <a:pt x="2136992" y="2536753"/>
-                  </a:lnTo>
-                  <a:lnTo>
-                    <a:pt x="2208615" y="2577202"/>
-                  </a:lnTo>
-                  <a:lnTo>
-                    <a:pt x="2280237" y="2615923"/>
-                  </a:lnTo>
-                  <a:lnTo>
-                    <a:pt x="2351860" y="2652991"/>
-                  </a:lnTo>
-                  <a:lnTo>
-                    <a:pt x="2423482" y="2665424"/>
-                  </a:lnTo>
-                  <a:lnTo>
-                    <a:pt x="2495105" y="2676819"/>
-                  </a:lnTo>
-                  <a:lnTo>
-                    <a:pt x="2566727" y="2688055"/>
-                  </a:lnTo>
-                  <a:lnTo>
-                    <a:pt x="2638350" y="2699135"/>
-                  </a:lnTo>
-                  <a:lnTo>
-                    <a:pt x="2709972" y="2710060"/>
-                  </a:lnTo>
-                  <a:lnTo>
-                    <a:pt x="2781595" y="2720833"/>
-                  </a:lnTo>
-                  <a:lnTo>
-                    <a:pt x="2853217" y="2731457"/>
-                  </a:lnTo>
-                  <a:lnTo>
-                    <a:pt x="2924840" y="2741932"/>
-                  </a:lnTo>
-                  <a:lnTo>
-                    <a:pt x="2996463" y="2752262"/>
-                  </a:lnTo>
-                  <a:lnTo>
-                    <a:pt x="3068085" y="2762447"/>
-                  </a:lnTo>
-                  <a:lnTo>
-                    <a:pt x="3139708" y="2772491"/>
-                  </a:lnTo>
-                  <a:lnTo>
-                    <a:pt x="3211330" y="2782395"/>
-                  </a:lnTo>
-                  <a:lnTo>
-                    <a:pt x="3282953" y="2792161"/>
-                  </a:lnTo>
-                  <a:lnTo>
-                    <a:pt x="3354575" y="2801791"/>
-                  </a:lnTo>
-                  <a:lnTo>
-                    <a:pt x="3426198" y="2811287"/>
-                  </a:lnTo>
-                  <a:lnTo>
-                    <a:pt x="3497820" y="2820651"/>
-                  </a:lnTo>
-                  <a:lnTo>
-                    <a:pt x="3569443" y="2829885"/>
-                  </a:lnTo>
-                  <a:lnTo>
-                    <a:pt x="3641065" y="2838989"/>
-                  </a:lnTo>
-                  <a:lnTo>
-                    <a:pt x="3712688" y="2847967"/>
-                  </a:lnTo>
-                  <a:lnTo>
-                    <a:pt x="3784310" y="2856820"/>
-                  </a:lnTo>
-                  <a:lnTo>
-                    <a:pt x="3855933" y="2865550"/>
-                  </a:lnTo>
-                  <a:lnTo>
-                    <a:pt x="3927555" y="2874158"/>
-                  </a:lnTo>
-                  <a:lnTo>
-                    <a:pt x="3999178" y="2882647"/>
-                  </a:lnTo>
-                  <a:lnTo>
-                    <a:pt x="4070800" y="2891017"/>
-                  </a:lnTo>
-                  <a:lnTo>
-                    <a:pt x="4142423" y="2899270"/>
-                  </a:lnTo>
-                  <a:lnTo>
-                    <a:pt x="4214045" y="2907409"/>
-                  </a:lnTo>
-                  <a:lnTo>
-                    <a:pt x="4285668" y="2915434"/>
-                  </a:lnTo>
-                  <a:lnTo>
-                    <a:pt x="4357291" y="2923348"/>
-                  </a:lnTo>
-                  <a:lnTo>
-                    <a:pt x="4428913" y="2931151"/>
-                  </a:lnTo>
-                  <a:lnTo>
-                    <a:pt x="4500536" y="2938846"/>
-                  </a:lnTo>
-                  <a:lnTo>
-                    <a:pt x="4572158" y="2946433"/>
-                  </a:lnTo>
-                  <a:lnTo>
-                    <a:pt x="4643781" y="2953915"/>
-                  </a:lnTo>
-                  <a:lnTo>
-                    <a:pt x="4715403" y="2961293"/>
-                  </a:lnTo>
-                  <a:lnTo>
-                    <a:pt x="4787026" y="2968568"/>
-                  </a:lnTo>
-                  <a:lnTo>
-                    <a:pt x="4858648" y="2975742"/>
-                  </a:lnTo>
-                  <a:lnTo>
-                    <a:pt x="4930271" y="2982816"/>
-                  </a:lnTo>
-                  <a:lnTo>
-                    <a:pt x="5001893" y="2989791"/>
-                  </a:lnTo>
-                  <a:lnTo>
-                    <a:pt x="5073516" y="2996669"/>
-                  </a:lnTo>
-                  <a:lnTo>
-                    <a:pt x="5145138" y="3003451"/>
-                  </a:lnTo>
-                  <a:lnTo>
-                    <a:pt x="5216761" y="3010139"/>
-                  </a:lnTo>
-                  <a:lnTo>
-                    <a:pt x="5288383" y="3016734"/>
-                  </a:lnTo>
-                  <a:lnTo>
-                    <a:pt x="5360006" y="3023237"/>
-                  </a:lnTo>
-                  <a:lnTo>
-                    <a:pt x="5431628" y="3029650"/>
-                  </a:lnTo>
-                  <a:lnTo>
-                    <a:pt x="5503251" y="3035973"/>
-                  </a:lnTo>
-                  <a:lnTo>
-                    <a:pt x="5574873" y="3042208"/>
-                  </a:lnTo>
-                  <a:lnTo>
-                    <a:pt x="5646496" y="3048356"/>
-                  </a:lnTo>
-                  <a:lnTo>
-                    <a:pt x="5718119" y="3054419"/>
-                  </a:lnTo>
-                  <a:lnTo>
-                    <a:pt x="5789741" y="3060397"/>
-                  </a:lnTo>
-                  <a:lnTo>
-                    <a:pt x="5861364" y="3066292"/>
-                  </a:lnTo>
-                  <a:lnTo>
-                    <a:pt x="5932986" y="3072105"/>
-                  </a:lnTo>
-                  <a:lnTo>
-                    <a:pt x="6004609" y="3077837"/>
-                  </a:lnTo>
-                  <a:lnTo>
-                    <a:pt x="6076231" y="3083489"/>
-                  </a:lnTo>
-                  <a:lnTo>
-                    <a:pt x="6147854" y="3089063"/>
-                  </a:lnTo>
-                  <a:lnTo>
-                    <a:pt x="6219476" y="3094558"/>
-                  </a:lnTo>
-                  <a:lnTo>
-                    <a:pt x="6291099" y="3099978"/>
-                  </a:lnTo>
-                  <a:lnTo>
-                    <a:pt x="6362721" y="3105322"/>
+                    <a:pt x="55438" y="115337"/>
+                  </a:lnTo>
+                  <a:lnTo>
+                    <a:pt x="127061" y="258032"/>
+                  </a:lnTo>
+                  <a:lnTo>
+                    <a:pt x="198683" y="394682"/>
+                  </a:lnTo>
+                  <a:lnTo>
+                    <a:pt x="270306" y="525543"/>
+                  </a:lnTo>
+                  <a:lnTo>
+                    <a:pt x="341928" y="650860"/>
+                  </a:lnTo>
+                  <a:lnTo>
+                    <a:pt x="413551" y="770869"/>
+                  </a:lnTo>
+                  <a:lnTo>
+                    <a:pt x="485173" y="885793"/>
+                  </a:lnTo>
+                  <a:lnTo>
+                    <a:pt x="556796" y="995850"/>
+                  </a:lnTo>
+                  <a:lnTo>
+                    <a:pt x="628418" y="1101244"/>
+                  </a:lnTo>
+                  <a:lnTo>
+                    <a:pt x="700041" y="1202173"/>
+                  </a:lnTo>
+                  <a:lnTo>
+                    <a:pt x="771663" y="1298826"/>
+                  </a:lnTo>
+                  <a:lnTo>
+                    <a:pt x="843286" y="1391385"/>
+                  </a:lnTo>
+                  <a:lnTo>
+                    <a:pt x="914909" y="1480023"/>
+                  </a:lnTo>
+                  <a:lnTo>
+                    <a:pt x="986531" y="1564906"/>
+                  </a:lnTo>
+                  <a:lnTo>
+                    <a:pt x="1058154" y="1646194"/>
+                  </a:lnTo>
+                  <a:lnTo>
+                    <a:pt x="1129776" y="1724037"/>
+                  </a:lnTo>
+                  <a:lnTo>
+                    <a:pt x="1201399" y="1798583"/>
+                  </a:lnTo>
+                  <a:lnTo>
+                    <a:pt x="1273021" y="1869971"/>
+                  </a:lnTo>
+                  <a:lnTo>
+                    <a:pt x="1344644" y="1938335"/>
+                  </a:lnTo>
+                  <a:lnTo>
+                    <a:pt x="1416266" y="2003803"/>
+                  </a:lnTo>
+                  <a:lnTo>
+                    <a:pt x="1487889" y="2066497"/>
+                  </a:lnTo>
+                  <a:lnTo>
+                    <a:pt x="1559511" y="2126536"/>
+                  </a:lnTo>
+                  <a:lnTo>
+                    <a:pt x="1631134" y="2184031"/>
+                  </a:lnTo>
+                  <a:lnTo>
+                    <a:pt x="1702756" y="2239090"/>
+                  </a:lnTo>
+                  <a:lnTo>
+                    <a:pt x="1774379" y="2291817"/>
+                  </a:lnTo>
+                  <a:lnTo>
+                    <a:pt x="1846001" y="2342310"/>
+                  </a:lnTo>
+                  <a:lnTo>
+                    <a:pt x="1917624" y="2390665"/>
+                  </a:lnTo>
+                  <a:lnTo>
+                    <a:pt x="1989246" y="2436971"/>
+                  </a:lnTo>
+                  <a:lnTo>
+                    <a:pt x="2060869" y="2481315"/>
+                  </a:lnTo>
+                  <a:lnTo>
+                    <a:pt x="2132491" y="2523780"/>
+                  </a:lnTo>
+                  <a:lnTo>
+                    <a:pt x="2204114" y="2564447"/>
+                  </a:lnTo>
+                  <a:lnTo>
+                    <a:pt x="2275737" y="2603391"/>
+                  </a:lnTo>
+                  <a:lnTo>
+                    <a:pt x="2347359" y="2640685"/>
+                  </a:lnTo>
+                  <a:lnTo>
+                    <a:pt x="2418982" y="2661367"/>
+                  </a:lnTo>
+                  <a:lnTo>
+                    <a:pt x="2490604" y="2672587"/>
+                  </a:lnTo>
+                  <a:lnTo>
+                    <a:pt x="2562227" y="2683655"/>
+                  </a:lnTo>
+                  <a:lnTo>
+                    <a:pt x="2633849" y="2694571"/>
+                  </a:lnTo>
+                  <a:lnTo>
+                    <a:pt x="2705472" y="2705339"/>
+                  </a:lnTo>
+                  <a:lnTo>
+                    <a:pt x="2777094" y="2715959"/>
+                  </a:lnTo>
+                  <a:lnTo>
+                    <a:pt x="2848717" y="2726435"/>
+                  </a:lnTo>
+                  <a:lnTo>
+                    <a:pt x="2920339" y="2736767"/>
+                  </a:lnTo>
+                  <a:lnTo>
+                    <a:pt x="2991962" y="2746959"/>
+                  </a:lnTo>
+                  <a:lnTo>
+                    <a:pt x="3063584" y="2757012"/>
+                  </a:lnTo>
+                  <a:lnTo>
+                    <a:pt x="3135207" y="2766927"/>
+                  </a:lnTo>
+                  <a:lnTo>
+                    <a:pt x="3206829" y="2776707"/>
+                  </a:lnTo>
+                  <a:lnTo>
+                    <a:pt x="3278452" y="2786354"/>
+                  </a:lnTo>
+                  <a:lnTo>
+                    <a:pt x="3350074" y="2795869"/>
+                  </a:lnTo>
+                  <a:lnTo>
+                    <a:pt x="3421697" y="2805255"/>
+                  </a:lnTo>
+                  <a:lnTo>
+                    <a:pt x="3493319" y="2814512"/>
+                  </a:lnTo>
+                  <a:lnTo>
+                    <a:pt x="3564942" y="2823643"/>
+                  </a:lnTo>
+                  <a:lnTo>
+                    <a:pt x="3636565" y="2832649"/>
+                  </a:lnTo>
+                  <a:lnTo>
+                    <a:pt x="3708187" y="2841533"/>
+                  </a:lnTo>
+                  <a:lnTo>
+                    <a:pt x="3779810" y="2850295"/>
+                  </a:lnTo>
+                  <a:lnTo>
+                    <a:pt x="3851432" y="2858938"/>
+                  </a:lnTo>
+                  <a:lnTo>
+                    <a:pt x="3923055" y="2867463"/>
+                  </a:lnTo>
+                  <a:lnTo>
+                    <a:pt x="3994677" y="2875871"/>
+                  </a:lnTo>
+                  <a:lnTo>
+                    <a:pt x="4066300" y="2884165"/>
+                  </a:lnTo>
+                  <a:lnTo>
+                    <a:pt x="4137922" y="2892346"/>
+                  </a:lnTo>
+                  <a:lnTo>
+                    <a:pt x="4209545" y="2900415"/>
+                  </a:lnTo>
+                  <a:lnTo>
+                    <a:pt x="4281167" y="2908374"/>
+                  </a:lnTo>
+                  <a:lnTo>
+                    <a:pt x="4352790" y="2916224"/>
+                  </a:lnTo>
+                  <a:lnTo>
+                    <a:pt x="4424412" y="2923967"/>
+                  </a:lnTo>
+                  <a:lnTo>
+                    <a:pt x="4496035" y="2931605"/>
+                  </a:lnTo>
+                  <a:lnTo>
+                    <a:pt x="4567657" y="2939138"/>
+                  </a:lnTo>
+                  <a:lnTo>
+                    <a:pt x="4639280" y="2946569"/>
+                  </a:lnTo>
+                  <a:lnTo>
+                    <a:pt x="4710902" y="2953898"/>
+                  </a:lnTo>
+                  <a:lnTo>
+                    <a:pt x="4782525" y="2961127"/>
+                  </a:lnTo>
+                  <a:lnTo>
+                    <a:pt x="4854147" y="2968258"/>
+                  </a:lnTo>
+                  <a:lnTo>
+                    <a:pt x="4925770" y="2975291"/>
+                  </a:lnTo>
+                  <a:lnTo>
+                    <a:pt x="4997393" y="2982228"/>
+                  </a:lnTo>
+                  <a:lnTo>
+                    <a:pt x="5069015" y="2989071"/>
+                  </a:lnTo>
+                  <a:lnTo>
+                    <a:pt x="5140638" y="2995820"/>
+                  </a:lnTo>
+                  <a:lnTo>
+                    <a:pt x="5212260" y="3002477"/>
+                  </a:lnTo>
+                  <a:lnTo>
+                    <a:pt x="5283883" y="3009044"/>
+                  </a:lnTo>
+                  <a:lnTo>
+                    <a:pt x="5355505" y="3015521"/>
+                  </a:lnTo>
+                  <a:lnTo>
+                    <a:pt x="5427128" y="3021909"/>
+                  </a:lnTo>
+                  <a:lnTo>
+                    <a:pt x="5498750" y="3028210"/>
+                  </a:lnTo>
+                  <a:lnTo>
+                    <a:pt x="5570373" y="3034426"/>
+                  </a:lnTo>
+                  <a:lnTo>
+                    <a:pt x="5641995" y="3040556"/>
+                  </a:lnTo>
+                  <a:lnTo>
+                    <a:pt x="5713618" y="3046603"/>
+                  </a:lnTo>
+                  <a:lnTo>
+                    <a:pt x="5785240" y="3052567"/>
+                  </a:lnTo>
+                  <a:lnTo>
+                    <a:pt x="5856863" y="3058450"/>
+                  </a:lnTo>
+                  <a:lnTo>
+                    <a:pt x="5928485" y="3064253"/>
+                  </a:lnTo>
+                  <a:lnTo>
+                    <a:pt x="6000108" y="3069976"/>
+                  </a:lnTo>
+                  <a:lnTo>
+                    <a:pt x="6071730" y="3075622"/>
+                  </a:lnTo>
+                  <a:lnTo>
+                    <a:pt x="6143353" y="3081190"/>
+                  </a:lnTo>
+                  <a:lnTo>
+                    <a:pt x="6214975" y="3086683"/>
+                  </a:lnTo>
+                  <a:lnTo>
+                    <a:pt x="6286598" y="3092100"/>
+                  </a:lnTo>
+                  <a:lnTo>
+                    <a:pt x="6358221" y="3097444"/>
                   </a:lnTo>
                 </a:path>
               </a:pathLst>
@@ -4285,309 +4285,309 @@
           </p:nvSpPr>
           <p:spPr>
             <a:xfrm>
-              <a:off x="1172049" y="4040616"/>
-              <a:ext cx="7090630" cy="1444550"/>
+              <a:off x="1172049" y="4052071"/>
+              <a:ext cx="7090630" cy="1430512"/>
             </a:xfrm>
             <a:custGeom>
               <a:avLst/>
               <a:pathLst>
-                <a:path w="7090630" h="1444550">
+                <a:path w="7090630" h="1430512">
                   <a:moveTo>
-                    <a:pt x="7090630" y="1444550"/>
+                    <a:pt x="7090630" y="1430512"/>
                   </a:moveTo>
                   <a:lnTo>
-                    <a:pt x="7019007" y="1441334"/>
-                  </a:lnTo>
-                  <a:lnTo>
-                    <a:pt x="6947385" y="1437974"/>
-                  </a:lnTo>
-                  <a:lnTo>
-                    <a:pt x="6875762" y="1434464"/>
-                  </a:lnTo>
-                  <a:lnTo>
-                    <a:pt x="6804139" y="1430798"/>
-                  </a:lnTo>
-                  <a:lnTo>
-                    <a:pt x="6732517" y="1426968"/>
-                  </a:lnTo>
-                  <a:lnTo>
-                    <a:pt x="6660894" y="1422967"/>
-                  </a:lnTo>
-                  <a:lnTo>
-                    <a:pt x="6589272" y="1418788"/>
-                  </a:lnTo>
-                  <a:lnTo>
-                    <a:pt x="6517649" y="1414422"/>
-                  </a:lnTo>
-                  <a:lnTo>
-                    <a:pt x="6446027" y="1409862"/>
-                  </a:lnTo>
-                  <a:lnTo>
-                    <a:pt x="6374404" y="1405098"/>
-                  </a:lnTo>
-                  <a:lnTo>
-                    <a:pt x="6302782" y="1400121"/>
-                  </a:lnTo>
-                  <a:lnTo>
-                    <a:pt x="6231159" y="1394923"/>
-                  </a:lnTo>
-                  <a:lnTo>
-                    <a:pt x="6159537" y="1389492"/>
-                  </a:lnTo>
-                  <a:lnTo>
-                    <a:pt x="6087914" y="1383819"/>
-                  </a:lnTo>
-                  <a:lnTo>
-                    <a:pt x="6016292" y="1377893"/>
-                  </a:lnTo>
-                  <a:lnTo>
-                    <a:pt x="5944669" y="1371703"/>
-                  </a:lnTo>
-                  <a:lnTo>
-                    <a:pt x="5873047" y="1365236"/>
-                  </a:lnTo>
-                  <a:lnTo>
-                    <a:pt x="5801424" y="1358481"/>
-                  </a:lnTo>
-                  <a:lnTo>
-                    <a:pt x="5729802" y="1351424"/>
-                  </a:lnTo>
-                  <a:lnTo>
-                    <a:pt x="5658179" y="1344053"/>
-                  </a:lnTo>
-                  <a:lnTo>
-                    <a:pt x="5586557" y="1336353"/>
-                  </a:lnTo>
-                  <a:lnTo>
-                    <a:pt x="5514934" y="1328309"/>
-                  </a:lnTo>
-                  <a:lnTo>
-                    <a:pt x="5443311" y="1319906"/>
-                  </a:lnTo>
-                  <a:lnTo>
-                    <a:pt x="5371689" y="1311128"/>
-                  </a:lnTo>
-                  <a:lnTo>
-                    <a:pt x="5300066" y="1301959"/>
-                  </a:lnTo>
-                  <a:lnTo>
-                    <a:pt x="5228444" y="1292380"/>
-                  </a:lnTo>
-                  <a:lnTo>
-                    <a:pt x="5156821" y="1282374"/>
-                  </a:lnTo>
-                  <a:lnTo>
-                    <a:pt x="5085199" y="1271922"/>
-                  </a:lnTo>
-                  <a:lnTo>
-                    <a:pt x="5013576" y="1261003"/>
-                  </a:lnTo>
-                  <a:lnTo>
-                    <a:pt x="4941954" y="1249597"/>
-                  </a:lnTo>
-                  <a:lnTo>
-                    <a:pt x="4870331" y="1237683"/>
-                  </a:lnTo>
-                  <a:lnTo>
-                    <a:pt x="4798709" y="1225236"/>
-                  </a:lnTo>
-                  <a:lnTo>
-                    <a:pt x="4727086" y="1212234"/>
-                  </a:lnTo>
-                  <a:lnTo>
-                    <a:pt x="4655464" y="1198653"/>
-                  </a:lnTo>
-                  <a:lnTo>
-                    <a:pt x="4583841" y="1184465"/>
-                  </a:lnTo>
-                  <a:lnTo>
-                    <a:pt x="4512219" y="1169644"/>
-                  </a:lnTo>
-                  <a:lnTo>
-                    <a:pt x="4440596" y="1154161"/>
-                  </a:lnTo>
-                  <a:lnTo>
-                    <a:pt x="4368974" y="1137988"/>
-                  </a:lnTo>
-                  <a:lnTo>
-                    <a:pt x="4297351" y="1121094"/>
-                  </a:lnTo>
-                  <a:lnTo>
-                    <a:pt x="4225729" y="1103445"/>
-                  </a:lnTo>
-                  <a:lnTo>
-                    <a:pt x="4154106" y="1085009"/>
-                  </a:lnTo>
-                  <a:lnTo>
-                    <a:pt x="4082483" y="1065751"/>
-                  </a:lnTo>
-                  <a:lnTo>
-                    <a:pt x="4010861" y="1045633"/>
-                  </a:lnTo>
-                  <a:lnTo>
-                    <a:pt x="3939238" y="1024617"/>
-                  </a:lnTo>
-                  <a:lnTo>
-                    <a:pt x="3867616" y="1002664"/>
-                  </a:lnTo>
-                  <a:lnTo>
-                    <a:pt x="3795993" y="979731"/>
-                  </a:lnTo>
-                  <a:lnTo>
-                    <a:pt x="3724371" y="955775"/>
-                  </a:lnTo>
-                  <a:lnTo>
-                    <a:pt x="3652748" y="930750"/>
-                  </a:lnTo>
-                  <a:lnTo>
-                    <a:pt x="3581126" y="904609"/>
-                  </a:lnTo>
-                  <a:lnTo>
-                    <a:pt x="3509503" y="877301"/>
-                  </a:lnTo>
-                  <a:lnTo>
-                    <a:pt x="3437881" y="848775"/>
-                  </a:lnTo>
-                  <a:lnTo>
-                    <a:pt x="3366258" y="818976"/>
-                  </a:lnTo>
-                  <a:lnTo>
-                    <a:pt x="3294636" y="787847"/>
-                  </a:lnTo>
-                  <a:lnTo>
-                    <a:pt x="3223013" y="755330"/>
-                  </a:lnTo>
-                  <a:lnTo>
-                    <a:pt x="3151391" y="721361"/>
-                  </a:lnTo>
-                  <a:lnTo>
-                    <a:pt x="3079768" y="686754"/>
-                  </a:lnTo>
-                  <a:lnTo>
-                    <a:pt x="3008146" y="675035"/>
-                  </a:lnTo>
-                  <a:lnTo>
-                    <a:pt x="2936523" y="663151"/>
-                  </a:lnTo>
-                  <a:lnTo>
-                    <a:pt x="2864901" y="651099"/>
-                  </a:lnTo>
-                  <a:lnTo>
-                    <a:pt x="2793278" y="638876"/>
-                  </a:lnTo>
-                  <a:lnTo>
-                    <a:pt x="2721655" y="626481"/>
-                  </a:lnTo>
-                  <a:lnTo>
-                    <a:pt x="2650033" y="613911"/>
-                  </a:lnTo>
-                  <a:lnTo>
-                    <a:pt x="2578410" y="601163"/>
-                  </a:lnTo>
-                  <a:lnTo>
-                    <a:pt x="2506788" y="588236"/>
-                  </a:lnTo>
-                  <a:lnTo>
-                    <a:pt x="2435165" y="575126"/>
-                  </a:lnTo>
-                  <a:lnTo>
-                    <a:pt x="2363543" y="561830"/>
-                  </a:lnTo>
-                  <a:lnTo>
-                    <a:pt x="2291920" y="548347"/>
-                  </a:lnTo>
-                  <a:lnTo>
-                    <a:pt x="2220298" y="534674"/>
-                  </a:lnTo>
-                  <a:lnTo>
-                    <a:pt x="2148675" y="520807"/>
-                  </a:lnTo>
-                  <a:lnTo>
-                    <a:pt x="2077053" y="506745"/>
-                  </a:lnTo>
-                  <a:lnTo>
-                    <a:pt x="2005430" y="492484"/>
-                  </a:lnTo>
-                  <a:lnTo>
-                    <a:pt x="1933808" y="478022"/>
-                  </a:lnTo>
-                  <a:lnTo>
-                    <a:pt x="1862185" y="463355"/>
-                  </a:lnTo>
-                  <a:lnTo>
-                    <a:pt x="1790563" y="448481"/>
-                  </a:lnTo>
-                  <a:lnTo>
-                    <a:pt x="1718940" y="433398"/>
-                  </a:lnTo>
-                  <a:lnTo>
-                    <a:pt x="1647318" y="418101"/>
-                  </a:lnTo>
-                  <a:lnTo>
-                    <a:pt x="1575695" y="402588"/>
-                  </a:lnTo>
-                  <a:lnTo>
-                    <a:pt x="1504073" y="386856"/>
-                  </a:lnTo>
-                  <a:lnTo>
-                    <a:pt x="1432450" y="370903"/>
-                  </a:lnTo>
-                  <a:lnTo>
-                    <a:pt x="1360827" y="354723"/>
-                  </a:lnTo>
-                  <a:lnTo>
-                    <a:pt x="1289205" y="338316"/>
-                  </a:lnTo>
-                  <a:lnTo>
-                    <a:pt x="1217582" y="321676"/>
-                  </a:lnTo>
-                  <a:lnTo>
-                    <a:pt x="1145960" y="304802"/>
-                  </a:lnTo>
-                  <a:lnTo>
-                    <a:pt x="1074337" y="287689"/>
-                  </a:lnTo>
-                  <a:lnTo>
-                    <a:pt x="1002715" y="270335"/>
-                  </a:lnTo>
-                  <a:lnTo>
-                    <a:pt x="931092" y="252736"/>
-                  </a:lnTo>
-                  <a:lnTo>
-                    <a:pt x="859470" y="234888"/>
-                  </a:lnTo>
-                  <a:lnTo>
-                    <a:pt x="787847" y="216788"/>
-                  </a:lnTo>
-                  <a:lnTo>
-                    <a:pt x="716225" y="198432"/>
-                  </a:lnTo>
-                  <a:lnTo>
-                    <a:pt x="644602" y="179818"/>
-                  </a:lnTo>
-                  <a:lnTo>
-                    <a:pt x="572980" y="160940"/>
-                  </a:lnTo>
-                  <a:lnTo>
-                    <a:pt x="501357" y="141796"/>
-                  </a:lnTo>
-                  <a:lnTo>
-                    <a:pt x="429735" y="122381"/>
-                  </a:lnTo>
-                  <a:lnTo>
-                    <a:pt x="358112" y="102693"/>
-                  </a:lnTo>
-                  <a:lnTo>
-                    <a:pt x="286490" y="82726"/>
-                  </a:lnTo>
-                  <a:lnTo>
-                    <a:pt x="214867" y="62477"/>
-                  </a:lnTo>
-                  <a:lnTo>
-                    <a:pt x="143245" y="41943"/>
-                  </a:lnTo>
-                  <a:lnTo>
-                    <a:pt x="71622" y="21118"/>
+                    <a:pt x="7019007" y="1427209"/>
+                  </a:lnTo>
+                  <a:lnTo>
+                    <a:pt x="6947385" y="1423760"/>
+                  </a:lnTo>
+                  <a:lnTo>
+                    <a:pt x="6875762" y="1420159"/>
+                  </a:lnTo>
+                  <a:lnTo>
+                    <a:pt x="6804139" y="1416398"/>
+                  </a:lnTo>
+                  <a:lnTo>
+                    <a:pt x="6732517" y="1412470"/>
+                  </a:lnTo>
+                  <a:lnTo>
+                    <a:pt x="6660894" y="1408369"/>
+                  </a:lnTo>
+                  <a:lnTo>
+                    <a:pt x="6589272" y="1404087"/>
+                  </a:lnTo>
+                  <a:lnTo>
+                    <a:pt x="6517649" y="1399615"/>
+                  </a:lnTo>
+                  <a:lnTo>
+                    <a:pt x="6446027" y="1394945"/>
+                  </a:lnTo>
+                  <a:lnTo>
+                    <a:pt x="6374404" y="1390069"/>
+                  </a:lnTo>
+                  <a:lnTo>
+                    <a:pt x="6302782" y="1384977"/>
+                  </a:lnTo>
+                  <a:lnTo>
+                    <a:pt x="6231159" y="1379660"/>
+                  </a:lnTo>
+                  <a:lnTo>
+                    <a:pt x="6159537" y="1374107"/>
+                  </a:lnTo>
+                  <a:lnTo>
+                    <a:pt x="6087914" y="1368309"/>
+                  </a:lnTo>
+                  <a:lnTo>
+                    <a:pt x="6016292" y="1362254"/>
+                  </a:lnTo>
+                  <a:lnTo>
+                    <a:pt x="5944669" y="1355932"/>
+                  </a:lnTo>
+                  <a:lnTo>
+                    <a:pt x="5873047" y="1349330"/>
+                  </a:lnTo>
+                  <a:lnTo>
+                    <a:pt x="5801424" y="1342436"/>
+                  </a:lnTo>
+                  <a:lnTo>
+                    <a:pt x="5729802" y="1335236"/>
+                  </a:lnTo>
+                  <a:lnTo>
+                    <a:pt x="5658179" y="1327719"/>
+                  </a:lnTo>
+                  <a:lnTo>
+                    <a:pt x="5586557" y="1319869"/>
+                  </a:lnTo>
+                  <a:lnTo>
+                    <a:pt x="5514934" y="1311671"/>
+                  </a:lnTo>
+                  <a:lnTo>
+                    <a:pt x="5443311" y="1303111"/>
+                  </a:lnTo>
+                  <a:lnTo>
+                    <a:pt x="5371689" y="1294172"/>
+                  </a:lnTo>
+                  <a:lnTo>
+                    <a:pt x="5300066" y="1284838"/>
+                  </a:lnTo>
+                  <a:lnTo>
+                    <a:pt x="5228444" y="1275091"/>
+                  </a:lnTo>
+                  <a:lnTo>
+                    <a:pt x="5156821" y="1264913"/>
+                  </a:lnTo>
+                  <a:lnTo>
+                    <a:pt x="5085199" y="1254284"/>
+                  </a:lnTo>
+                  <a:lnTo>
+                    <a:pt x="5013576" y="1243186"/>
+                  </a:lnTo>
+                  <a:lnTo>
+                    <a:pt x="4941954" y="1231596"/>
+                  </a:lnTo>
+                  <a:lnTo>
+                    <a:pt x="4870331" y="1219494"/>
+                  </a:lnTo>
+                  <a:lnTo>
+                    <a:pt x="4798709" y="1206856"/>
+                  </a:lnTo>
+                  <a:lnTo>
+                    <a:pt x="4727086" y="1193659"/>
+                  </a:lnTo>
+                  <a:lnTo>
+                    <a:pt x="4655464" y="1179879"/>
+                  </a:lnTo>
+                  <a:lnTo>
+                    <a:pt x="4583841" y="1165489"/>
+                  </a:lnTo>
+                  <a:lnTo>
+                    <a:pt x="4512219" y="1150462"/>
+                  </a:lnTo>
+                  <a:lnTo>
+                    <a:pt x="4440596" y="1134770"/>
+                  </a:lnTo>
+                  <a:lnTo>
+                    <a:pt x="4368974" y="1118385"/>
+                  </a:lnTo>
+                  <a:lnTo>
+                    <a:pt x="4297351" y="1101274"/>
+                  </a:lnTo>
+                  <a:lnTo>
+                    <a:pt x="4225729" y="1083407"/>
+                  </a:lnTo>
+                  <a:lnTo>
+                    <a:pt x="4154106" y="1064749"/>
+                  </a:lnTo>
+                  <a:lnTo>
+                    <a:pt x="4082483" y="1045266"/>
+                  </a:lnTo>
+                  <a:lnTo>
+                    <a:pt x="4010861" y="1024921"/>
+                  </a:lnTo>
+                  <a:lnTo>
+                    <a:pt x="3939238" y="1003677"/>
+                  </a:lnTo>
+                  <a:lnTo>
+                    <a:pt x="3867616" y="981492"/>
+                  </a:lnTo>
+                  <a:lnTo>
+                    <a:pt x="3795993" y="958326"/>
+                  </a:lnTo>
+                  <a:lnTo>
+                    <a:pt x="3724371" y="934135"/>
+                  </a:lnTo>
+                  <a:lnTo>
+                    <a:pt x="3652748" y="908874"/>
+                  </a:lnTo>
+                  <a:lnTo>
+                    <a:pt x="3581126" y="882495"/>
+                  </a:lnTo>
+                  <a:lnTo>
+                    <a:pt x="3509503" y="854950"/>
+                  </a:lnTo>
+                  <a:lnTo>
+                    <a:pt x="3437881" y="826186"/>
+                  </a:lnTo>
+                  <a:lnTo>
+                    <a:pt x="3366258" y="796150"/>
+                  </a:lnTo>
+                  <a:lnTo>
+                    <a:pt x="3294636" y="764785"/>
+                  </a:lnTo>
+                  <a:lnTo>
+                    <a:pt x="3223013" y="732032"/>
+                  </a:lnTo>
+                  <a:lnTo>
+                    <a:pt x="3151391" y="697831"/>
+                  </a:lnTo>
+                  <a:lnTo>
+                    <a:pt x="3079768" y="671423"/>
+                  </a:lnTo>
+                  <a:lnTo>
+                    <a:pt x="3008146" y="659889"/>
+                  </a:lnTo>
+                  <a:lnTo>
+                    <a:pt x="2936523" y="648197"/>
+                  </a:lnTo>
+                  <a:lnTo>
+                    <a:pt x="2864901" y="636343"/>
+                  </a:lnTo>
+                  <a:lnTo>
+                    <a:pt x="2793278" y="624324"/>
+                  </a:lnTo>
+                  <a:lnTo>
+                    <a:pt x="2721655" y="612140"/>
+                  </a:lnTo>
+                  <a:lnTo>
+                    <a:pt x="2650033" y="599787"/>
+                  </a:lnTo>
+                  <a:lnTo>
+                    <a:pt x="2578410" y="587263"/>
+                  </a:lnTo>
+                  <a:lnTo>
+                    <a:pt x="2506788" y="574566"/>
+                  </a:lnTo>
+                  <a:lnTo>
+                    <a:pt x="2435165" y="561693"/>
+                  </a:lnTo>
+                  <a:lnTo>
+                    <a:pt x="2363543" y="548642"/>
+                  </a:lnTo>
+                  <a:lnTo>
+                    <a:pt x="2291920" y="535411"/>
+                  </a:lnTo>
+                  <a:lnTo>
+                    <a:pt x="2220298" y="521996"/>
+                  </a:lnTo>
+                  <a:lnTo>
+                    <a:pt x="2148675" y="508396"/>
+                  </a:lnTo>
+                  <a:lnTo>
+                    <a:pt x="2077053" y="494608"/>
+                  </a:lnTo>
+                  <a:lnTo>
+                    <a:pt x="2005430" y="480629"/>
+                  </a:lnTo>
+                  <a:lnTo>
+                    <a:pt x="1933808" y="466457"/>
+                  </a:lnTo>
+                  <a:lnTo>
+                    <a:pt x="1862185" y="452089"/>
+                  </a:lnTo>
+                  <a:lnTo>
+                    <a:pt x="1790563" y="437522"/>
+                  </a:lnTo>
+                  <a:lnTo>
+                    <a:pt x="1718940" y="422753"/>
+                  </a:lnTo>
+                  <a:lnTo>
+                    <a:pt x="1647318" y="407781"/>
+                  </a:lnTo>
+                  <a:lnTo>
+                    <a:pt x="1575695" y="392601"/>
+                  </a:lnTo>
+                  <a:lnTo>
+                    <a:pt x="1504073" y="377211"/>
+                  </a:lnTo>
+                  <a:lnTo>
+                    <a:pt x="1432450" y="361608"/>
+                  </a:lnTo>
+                  <a:lnTo>
+                    <a:pt x="1360827" y="345789"/>
+                  </a:lnTo>
+                  <a:lnTo>
+                    <a:pt x="1289205" y="329752"/>
+                  </a:lnTo>
+                  <a:lnTo>
+                    <a:pt x="1217582" y="313493"/>
+                  </a:lnTo>
+                  <a:lnTo>
+                    <a:pt x="1145960" y="297009"/>
+                  </a:lnTo>
+                  <a:lnTo>
+                    <a:pt x="1074337" y="280297"/>
+                  </a:lnTo>
+                  <a:lnTo>
+                    <a:pt x="1002715" y="263353"/>
+                  </a:lnTo>
+                  <a:lnTo>
+                    <a:pt x="931092" y="246176"/>
+                  </a:lnTo>
+                  <a:lnTo>
+                    <a:pt x="859470" y="228760"/>
+                  </a:lnTo>
+                  <a:lnTo>
+                    <a:pt x="787847" y="211104"/>
+                  </a:lnTo>
+                  <a:lnTo>
+                    <a:pt x="716225" y="193204"/>
+                  </a:lnTo>
+                  <a:lnTo>
+                    <a:pt x="644602" y="175056"/>
+                  </a:lnTo>
+                  <a:lnTo>
+                    <a:pt x="572980" y="156656"/>
+                  </a:lnTo>
+                  <a:lnTo>
+                    <a:pt x="501357" y="138003"/>
+                  </a:lnTo>
+                  <a:lnTo>
+                    <a:pt x="429735" y="119091"/>
+                  </a:lnTo>
+                  <a:lnTo>
+                    <a:pt x="358112" y="99918"/>
+                  </a:lnTo>
+                  <a:lnTo>
+                    <a:pt x="286490" y="80480"/>
+                  </a:lnTo>
+                  <a:lnTo>
+                    <a:pt x="214867" y="60772"/>
+                  </a:lnTo>
+                  <a:lnTo>
+                    <a:pt x="143245" y="40792"/>
+                  </a:lnTo>
+                  <a:lnTo>
+                    <a:pt x="71622" y="20536"/>
                   </a:lnTo>
                   <a:lnTo>
                     <a:pt x="0" y="0"/>
@@ -4610,312 +4610,312 @@
           </p:nvSpPr>
           <p:spPr>
             <a:xfrm>
-              <a:off x="1172049" y="2687981"/>
-              <a:ext cx="7090630" cy="2704107"/>
+              <a:off x="1172049" y="2700313"/>
+              <a:ext cx="7090630" cy="2687102"/>
             </a:xfrm>
             <a:custGeom>
               <a:avLst/>
               <a:pathLst>
-                <a:path w="7090630" h="2704107">
+                <a:path w="7090630" h="2687102">
                   <a:moveTo>
                     <a:pt x="0" y="0"/>
                   </a:moveTo>
                   <a:lnTo>
-                    <a:pt x="71622" y="81560"/>
-                  </a:lnTo>
-                  <a:lnTo>
-                    <a:pt x="143245" y="160802"/>
-                  </a:lnTo>
-                  <a:lnTo>
-                    <a:pt x="214867" y="237791"/>
-                  </a:lnTo>
-                  <a:lnTo>
-                    <a:pt x="286490" y="312592"/>
-                  </a:lnTo>
-                  <a:lnTo>
-                    <a:pt x="358112" y="385267"/>
-                  </a:lnTo>
-                  <a:lnTo>
-                    <a:pt x="429735" y="455876"/>
-                  </a:lnTo>
-                  <a:lnTo>
-                    <a:pt x="501357" y="524478"/>
-                  </a:lnTo>
-                  <a:lnTo>
-                    <a:pt x="572980" y="591130"/>
-                  </a:lnTo>
-                  <a:lnTo>
-                    <a:pt x="644602" y="655887"/>
-                  </a:lnTo>
-                  <a:lnTo>
-                    <a:pt x="716225" y="718803"/>
-                  </a:lnTo>
-                  <a:lnTo>
-                    <a:pt x="787847" y="779931"/>
-                  </a:lnTo>
-                  <a:lnTo>
-                    <a:pt x="859470" y="839322"/>
-                  </a:lnTo>
-                  <a:lnTo>
-                    <a:pt x="931092" y="897024"/>
-                  </a:lnTo>
-                  <a:lnTo>
-                    <a:pt x="1002715" y="953086"/>
-                  </a:lnTo>
-                  <a:lnTo>
-                    <a:pt x="1074337" y="1007554"/>
-                  </a:lnTo>
-                  <a:lnTo>
-                    <a:pt x="1145960" y="1060475"/>
-                  </a:lnTo>
-                  <a:lnTo>
-                    <a:pt x="1217582" y="1111890"/>
-                  </a:lnTo>
-                  <a:lnTo>
-                    <a:pt x="1289205" y="1161845"/>
-                  </a:lnTo>
-                  <a:lnTo>
-                    <a:pt x="1360827" y="1210379"/>
-                  </a:lnTo>
-                  <a:lnTo>
-                    <a:pt x="1432450" y="1257534"/>
-                  </a:lnTo>
-                  <a:lnTo>
-                    <a:pt x="1504073" y="1303348"/>
-                  </a:lnTo>
-                  <a:lnTo>
-                    <a:pt x="1575695" y="1347860"/>
-                  </a:lnTo>
-                  <a:lnTo>
-                    <a:pt x="1647318" y="1391107"/>
-                  </a:lnTo>
-                  <a:lnTo>
-                    <a:pt x="1718940" y="1433124"/>
-                  </a:lnTo>
-                  <a:lnTo>
-                    <a:pt x="1790563" y="1473948"/>
-                  </a:lnTo>
-                  <a:lnTo>
-                    <a:pt x="1862185" y="1513610"/>
-                  </a:lnTo>
-                  <a:lnTo>
-                    <a:pt x="1933808" y="1552145"/>
-                  </a:lnTo>
-                  <a:lnTo>
-                    <a:pt x="2005430" y="1589585"/>
-                  </a:lnTo>
-                  <a:lnTo>
-                    <a:pt x="2077053" y="1625961"/>
-                  </a:lnTo>
-                  <a:lnTo>
-                    <a:pt x="2148675" y="1661303"/>
-                  </a:lnTo>
-                  <a:lnTo>
-                    <a:pt x="2220298" y="1695640"/>
-                  </a:lnTo>
-                  <a:lnTo>
-                    <a:pt x="2291920" y="1729001"/>
-                  </a:lnTo>
-                  <a:lnTo>
-                    <a:pt x="2363543" y="1761413"/>
-                  </a:lnTo>
-                  <a:lnTo>
-                    <a:pt x="2435165" y="1792904"/>
-                  </a:lnTo>
-                  <a:lnTo>
-                    <a:pt x="2506788" y="1823501"/>
-                  </a:lnTo>
-                  <a:lnTo>
-                    <a:pt x="2578410" y="1853227"/>
-                  </a:lnTo>
-                  <a:lnTo>
-                    <a:pt x="2650033" y="1882109"/>
-                  </a:lnTo>
-                  <a:lnTo>
-                    <a:pt x="2721655" y="1910169"/>
-                  </a:lnTo>
-                  <a:lnTo>
-                    <a:pt x="2793278" y="1937432"/>
-                  </a:lnTo>
-                  <a:lnTo>
-                    <a:pt x="2864901" y="1963920"/>
-                  </a:lnTo>
-                  <a:lnTo>
-                    <a:pt x="2936523" y="1989655"/>
-                  </a:lnTo>
-                  <a:lnTo>
-                    <a:pt x="3008146" y="2014658"/>
-                  </a:lnTo>
-                  <a:lnTo>
-                    <a:pt x="3079768" y="2038951"/>
-                  </a:lnTo>
-                  <a:lnTo>
-                    <a:pt x="3151391" y="2062553"/>
-                  </a:lnTo>
-                  <a:lnTo>
-                    <a:pt x="3223013" y="2085484"/>
-                  </a:lnTo>
-                  <a:lnTo>
-                    <a:pt x="3294636" y="2107764"/>
-                  </a:lnTo>
-                  <a:lnTo>
-                    <a:pt x="3366258" y="2129410"/>
-                  </a:lnTo>
-                  <a:lnTo>
-                    <a:pt x="3437881" y="2150441"/>
-                  </a:lnTo>
-                  <a:lnTo>
-                    <a:pt x="3509503" y="2170874"/>
-                  </a:lnTo>
-                  <a:lnTo>
-                    <a:pt x="3581126" y="2190726"/>
-                  </a:lnTo>
-                  <a:lnTo>
-                    <a:pt x="3652748" y="2210014"/>
-                  </a:lnTo>
-                  <a:lnTo>
-                    <a:pt x="3724371" y="2228753"/>
-                  </a:lnTo>
-                  <a:lnTo>
-                    <a:pt x="3795993" y="2246960"/>
-                  </a:lnTo>
-                  <a:lnTo>
-                    <a:pt x="3867616" y="2264650"/>
-                  </a:lnTo>
-                  <a:lnTo>
-                    <a:pt x="3939238" y="2281836"/>
-                  </a:lnTo>
-                  <a:lnTo>
-                    <a:pt x="4010861" y="2298534"/>
-                  </a:lnTo>
-                  <a:lnTo>
-                    <a:pt x="4082483" y="2314758"/>
-                  </a:lnTo>
-                  <a:lnTo>
-                    <a:pt x="4154106" y="2330520"/>
-                  </a:lnTo>
-                  <a:lnTo>
-                    <a:pt x="4225729" y="2345834"/>
-                  </a:lnTo>
-                  <a:lnTo>
-                    <a:pt x="4297351" y="2360713"/>
-                  </a:lnTo>
-                  <a:lnTo>
-                    <a:pt x="4368974" y="2375169"/>
-                  </a:lnTo>
-                  <a:lnTo>
-                    <a:pt x="4440596" y="2389214"/>
-                  </a:lnTo>
-                  <a:lnTo>
-                    <a:pt x="4512219" y="2402860"/>
-                  </a:lnTo>
-                  <a:lnTo>
-                    <a:pt x="4583841" y="2416118"/>
-                  </a:lnTo>
-                  <a:lnTo>
-                    <a:pt x="4655464" y="2428999"/>
-                  </a:lnTo>
-                  <a:lnTo>
-                    <a:pt x="4727086" y="2441514"/>
-                  </a:lnTo>
-                  <a:lnTo>
-                    <a:pt x="4798709" y="2453673"/>
-                  </a:lnTo>
-                  <a:lnTo>
-                    <a:pt x="4870331" y="2465486"/>
-                  </a:lnTo>
-                  <a:lnTo>
-                    <a:pt x="4941954" y="2476964"/>
-                  </a:lnTo>
-                  <a:lnTo>
-                    <a:pt x="5013576" y="2488115"/>
-                  </a:lnTo>
-                  <a:lnTo>
-                    <a:pt x="5085199" y="2498950"/>
-                  </a:lnTo>
-                  <a:lnTo>
-                    <a:pt x="5156821" y="2509476"/>
-                  </a:lnTo>
-                  <a:lnTo>
-                    <a:pt x="5228444" y="2519703"/>
-                  </a:lnTo>
-                  <a:lnTo>
-                    <a:pt x="5300066" y="2529640"/>
-                  </a:lnTo>
-                  <a:lnTo>
-                    <a:pt x="5371689" y="2539294"/>
-                  </a:lnTo>
-                  <a:lnTo>
-                    <a:pt x="5443311" y="2548674"/>
-                  </a:lnTo>
-                  <a:lnTo>
-                    <a:pt x="5514934" y="2557787"/>
-                  </a:lnTo>
-                  <a:lnTo>
-                    <a:pt x="5586557" y="2566641"/>
-                  </a:lnTo>
-                  <a:lnTo>
-                    <a:pt x="5658179" y="2575243"/>
-                  </a:lnTo>
-                  <a:lnTo>
-                    <a:pt x="5729802" y="2583601"/>
-                  </a:lnTo>
-                  <a:lnTo>
-                    <a:pt x="5801424" y="2591721"/>
-                  </a:lnTo>
-                  <a:lnTo>
-                    <a:pt x="5873047" y="2599611"/>
-                  </a:lnTo>
-                  <a:lnTo>
-                    <a:pt x="5944669" y="2607276"/>
-                  </a:lnTo>
-                  <a:lnTo>
-                    <a:pt x="6016292" y="2614723"/>
-                  </a:lnTo>
-                  <a:lnTo>
-                    <a:pt x="6087914" y="2621959"/>
-                  </a:lnTo>
-                  <a:lnTo>
-                    <a:pt x="6159537" y="2628988"/>
-                  </a:lnTo>
-                  <a:lnTo>
-                    <a:pt x="6231159" y="2635819"/>
-                  </a:lnTo>
-                  <a:lnTo>
-                    <a:pt x="6302782" y="2642454"/>
-                  </a:lnTo>
-                  <a:lnTo>
-                    <a:pt x="6374404" y="2648902"/>
-                  </a:lnTo>
-                  <a:lnTo>
-                    <a:pt x="6446027" y="2655166"/>
-                  </a:lnTo>
-                  <a:lnTo>
-                    <a:pt x="6517649" y="2661252"/>
-                  </a:lnTo>
-                  <a:lnTo>
-                    <a:pt x="6589272" y="2667165"/>
-                  </a:lnTo>
-                  <a:lnTo>
-                    <a:pt x="6660894" y="2672910"/>
-                  </a:lnTo>
-                  <a:lnTo>
-                    <a:pt x="6732517" y="2678491"/>
-                  </a:lnTo>
-                  <a:lnTo>
-                    <a:pt x="6804139" y="2683914"/>
-                  </a:lnTo>
-                  <a:lnTo>
-                    <a:pt x="6875762" y="2689183"/>
-                  </a:lnTo>
-                  <a:lnTo>
-                    <a:pt x="6947385" y="2694302"/>
-                  </a:lnTo>
-                  <a:lnTo>
-                    <a:pt x="7019007" y="2699275"/>
-                  </a:lnTo>
-                  <a:lnTo>
-                    <a:pt x="7090630" y="2704107"/>
+                    <a:pt x="71622" y="80306"/>
+                  </a:lnTo>
+                  <a:lnTo>
+                    <a:pt x="143245" y="158355"/>
+                  </a:lnTo>
+                  <a:lnTo>
+                    <a:pt x="214867" y="234211"/>
+                  </a:lnTo>
+                  <a:lnTo>
+                    <a:pt x="286490" y="307934"/>
+                  </a:lnTo>
+                  <a:lnTo>
+                    <a:pt x="358112" y="379585"/>
+                  </a:lnTo>
+                  <a:lnTo>
+                    <a:pt x="429735" y="449221"/>
+                  </a:lnTo>
+                  <a:lnTo>
+                    <a:pt x="501357" y="516901"/>
+                  </a:lnTo>
+                  <a:lnTo>
+                    <a:pt x="572980" y="582678"/>
+                  </a:lnTo>
+                  <a:lnTo>
+                    <a:pt x="644602" y="646605"/>
+                  </a:lnTo>
+                  <a:lnTo>
+                    <a:pt x="716225" y="708736"/>
+                  </a:lnTo>
+                  <a:lnTo>
+                    <a:pt x="787847" y="769121"/>
+                  </a:lnTo>
+                  <a:lnTo>
+                    <a:pt x="859470" y="827808"/>
+                  </a:lnTo>
+                  <a:lnTo>
+                    <a:pt x="931092" y="884845"/>
+                  </a:lnTo>
+                  <a:lnTo>
+                    <a:pt x="1002715" y="940280"/>
+                  </a:lnTo>
+                  <a:lnTo>
+                    <a:pt x="1074337" y="994156"/>
+                  </a:lnTo>
+                  <a:lnTo>
+                    <a:pt x="1145960" y="1046517"/>
+                  </a:lnTo>
+                  <a:lnTo>
+                    <a:pt x="1217582" y="1097407"/>
+                  </a:lnTo>
+                  <a:lnTo>
+                    <a:pt x="1289205" y="1146866"/>
+                  </a:lnTo>
+                  <a:lnTo>
+                    <a:pt x="1360827" y="1194935"/>
+                  </a:lnTo>
+                  <a:lnTo>
+                    <a:pt x="1432450" y="1241653"/>
+                  </a:lnTo>
+                  <a:lnTo>
+                    <a:pt x="1504073" y="1287057"/>
+                  </a:lnTo>
+                  <a:lnTo>
+                    <a:pt x="1575695" y="1331186"/>
+                  </a:lnTo>
+                  <a:lnTo>
+                    <a:pt x="1647318" y="1374073"/>
+                  </a:lnTo>
+                  <a:lnTo>
+                    <a:pt x="1718940" y="1415756"/>
+                  </a:lnTo>
+                  <a:lnTo>
+                    <a:pt x="1790563" y="1456266"/>
+                  </a:lnTo>
+                  <a:lnTo>
+                    <a:pt x="1862185" y="1495638"/>
+                  </a:lnTo>
+                  <a:lnTo>
+                    <a:pt x="1933808" y="1533903"/>
+                  </a:lnTo>
+                  <a:lnTo>
+                    <a:pt x="2005430" y="1571093"/>
+                  </a:lnTo>
+                  <a:lnTo>
+                    <a:pt x="2077053" y="1607237"/>
+                  </a:lnTo>
+                  <a:lnTo>
+                    <a:pt x="2148675" y="1642365"/>
+                  </a:lnTo>
+                  <a:lnTo>
+                    <a:pt x="2220298" y="1676506"/>
+                  </a:lnTo>
+                  <a:lnTo>
+                    <a:pt x="2291920" y="1709687"/>
+                  </a:lnTo>
+                  <a:lnTo>
+                    <a:pt x="2363543" y="1741936"/>
+                  </a:lnTo>
+                  <a:lnTo>
+                    <a:pt x="2435165" y="1773278"/>
+                  </a:lnTo>
+                  <a:lnTo>
+                    <a:pt x="2506788" y="1803739"/>
+                  </a:lnTo>
+                  <a:lnTo>
+                    <a:pt x="2578410" y="1833343"/>
+                  </a:lnTo>
+                  <a:lnTo>
+                    <a:pt x="2650033" y="1862116"/>
+                  </a:lnTo>
+                  <a:lnTo>
+                    <a:pt x="2721655" y="1890080"/>
+                  </a:lnTo>
+                  <a:lnTo>
+                    <a:pt x="2793278" y="1917257"/>
+                  </a:lnTo>
+                  <a:lnTo>
+                    <a:pt x="2864901" y="1943671"/>
+                  </a:lnTo>
+                  <a:lnTo>
+                    <a:pt x="2936523" y="1969342"/>
+                  </a:lnTo>
+                  <a:lnTo>
+                    <a:pt x="3008146" y="1994292"/>
+                  </a:lnTo>
+                  <a:lnTo>
+                    <a:pt x="3079768" y="2018540"/>
+                  </a:lnTo>
+                  <a:lnTo>
+                    <a:pt x="3151391" y="2042107"/>
+                  </a:lnTo>
+                  <a:lnTo>
+                    <a:pt x="3223013" y="2065011"/>
+                  </a:lnTo>
+                  <a:lnTo>
+                    <a:pt x="3294636" y="2087272"/>
+                  </a:lnTo>
+                  <a:lnTo>
+                    <a:pt x="3366258" y="2108907"/>
+                  </a:lnTo>
+                  <a:lnTo>
+                    <a:pt x="3437881" y="2129933"/>
+                  </a:lnTo>
+                  <a:lnTo>
+                    <a:pt x="3509503" y="2150369"/>
+                  </a:lnTo>
+                  <a:lnTo>
+                    <a:pt x="3581126" y="2170230"/>
+                  </a:lnTo>
+                  <a:lnTo>
+                    <a:pt x="3652748" y="2189533"/>
+                  </a:lnTo>
+                  <a:lnTo>
+                    <a:pt x="3724371" y="2208293"/>
+                  </a:lnTo>
+                  <a:lnTo>
+                    <a:pt x="3795993" y="2226526"/>
+                  </a:lnTo>
+                  <a:lnTo>
+                    <a:pt x="3867616" y="2244246"/>
+                  </a:lnTo>
+                  <a:lnTo>
+                    <a:pt x="3939238" y="2261469"/>
+                  </a:lnTo>
+                  <a:lnTo>
+                    <a:pt x="4010861" y="2278207"/>
+                  </a:lnTo>
+                  <a:lnTo>
+                    <a:pt x="4082483" y="2294474"/>
+                  </a:lnTo>
+                  <a:lnTo>
+                    <a:pt x="4154106" y="2310285"/>
+                  </a:lnTo>
+                  <a:lnTo>
+                    <a:pt x="4225729" y="2325651"/>
+                  </a:lnTo>
+                  <a:lnTo>
+                    <a:pt x="4297351" y="2340585"/>
+                  </a:lnTo>
+                  <a:lnTo>
+                    <a:pt x="4368974" y="2355099"/>
+                  </a:lnTo>
+                  <a:lnTo>
+                    <a:pt x="4440596" y="2369206"/>
+                  </a:lnTo>
+                  <a:lnTo>
+                    <a:pt x="4512219" y="2382915"/>
+                  </a:lnTo>
+                  <a:lnTo>
+                    <a:pt x="4583841" y="2396240"/>
+                  </a:lnTo>
+                  <a:lnTo>
+                    <a:pt x="4655464" y="2409190"/>
+                  </a:lnTo>
+                  <a:lnTo>
+                    <a:pt x="4727086" y="2421775"/>
+                  </a:lnTo>
+                  <a:lnTo>
+                    <a:pt x="4798709" y="2434007"/>
+                  </a:lnTo>
+                  <a:lnTo>
+                    <a:pt x="4870331" y="2445896"/>
+                  </a:lnTo>
+                  <a:lnTo>
+                    <a:pt x="4941954" y="2457450"/>
+                  </a:lnTo>
+                  <a:lnTo>
+                    <a:pt x="5013576" y="2468679"/>
+                  </a:lnTo>
+                  <a:lnTo>
+                    <a:pt x="5085199" y="2479593"/>
+                  </a:lnTo>
+                  <a:lnTo>
+                    <a:pt x="5156821" y="2490200"/>
+                  </a:lnTo>
+                  <a:lnTo>
+                    <a:pt x="5228444" y="2500508"/>
+                  </a:lnTo>
+                  <a:lnTo>
+                    <a:pt x="5300066" y="2510527"/>
+                  </a:lnTo>
+                  <a:lnTo>
+                    <a:pt x="5371689" y="2520265"/>
+                  </a:lnTo>
+                  <a:lnTo>
+                    <a:pt x="5443311" y="2529728"/>
+                  </a:lnTo>
+                  <a:lnTo>
+                    <a:pt x="5514934" y="2538926"/>
+                  </a:lnTo>
+                  <a:lnTo>
+                    <a:pt x="5586557" y="2547865"/>
+                  </a:lnTo>
+                  <a:lnTo>
+                    <a:pt x="5658179" y="2556553"/>
+                  </a:lnTo>
+                  <a:lnTo>
+                    <a:pt x="5729802" y="2564996"/>
+                  </a:lnTo>
+                  <a:lnTo>
+                    <a:pt x="5801424" y="2573202"/>
+                  </a:lnTo>
+                  <a:lnTo>
+                    <a:pt x="5873047" y="2581178"/>
+                  </a:lnTo>
+                  <a:lnTo>
+                    <a:pt x="5944669" y="2588929"/>
+                  </a:lnTo>
+                  <a:lnTo>
+                    <a:pt x="6016292" y="2596463"/>
+                  </a:lnTo>
+                  <a:lnTo>
+                    <a:pt x="6087914" y="2603784"/>
+                  </a:lnTo>
+                  <a:lnTo>
+                    <a:pt x="6159537" y="2610900"/>
+                  </a:lnTo>
+                  <a:lnTo>
+                    <a:pt x="6231159" y="2617816"/>
+                  </a:lnTo>
+                  <a:lnTo>
+                    <a:pt x="6302782" y="2624538"/>
+                  </a:lnTo>
+                  <a:lnTo>
+                    <a:pt x="6374404" y="2631070"/>
+                  </a:lnTo>
+                  <a:lnTo>
+                    <a:pt x="6446027" y="2637419"/>
+                  </a:lnTo>
+                  <a:lnTo>
+                    <a:pt x="6517649" y="2643590"/>
+                  </a:lnTo>
+                  <a:lnTo>
+                    <a:pt x="6589272" y="2649587"/>
+                  </a:lnTo>
+                  <a:lnTo>
+                    <a:pt x="6660894" y="2655415"/>
+                  </a:lnTo>
+                  <a:lnTo>
+                    <a:pt x="6732517" y="2661080"/>
+                  </a:lnTo>
+                  <a:lnTo>
+                    <a:pt x="6804139" y="2666585"/>
+                  </a:lnTo>
+                  <a:lnTo>
+                    <a:pt x="6875762" y="2671936"/>
+                  </a:lnTo>
+                  <a:lnTo>
+                    <a:pt x="6947385" y="2677136"/>
+                  </a:lnTo>
+                  <a:lnTo>
+                    <a:pt x="7019007" y="2682190"/>
+                  </a:lnTo>
+                  <a:lnTo>
+                    <a:pt x="7090630" y="2687102"/>
                   </a:lnTo>
                 </a:path>
               </a:pathLst>
@@ -4987,7 +4987,7 @@
           </p:nvSpPr>
           <p:spPr>
             <a:xfrm>
-              <a:off x="4254372" y="2073503"/>
+              <a:off x="4278722" y="2073503"/>
               <a:ext cx="0" cy="3649639"/>
             </a:xfrm>
             <a:custGeom>
@@ -5260,7 +5260,7 @@
           </p:nvSpPr>
           <p:spPr>
             <a:xfrm>
-              <a:off x="1347083" y="5785772"/>
+              <a:off x="1347751" y="5785772"/>
               <a:ext cx="161574" cy="80101"/>
             </a:xfrm>
             <a:prstGeom prst="rect">
@@ -5306,7 +5306,7 @@
           </p:nvSpPr>
           <p:spPr>
             <a:xfrm>
-              <a:off x="2254916" y="5785772"/>
+              <a:off x="2255364" y="5785772"/>
               <a:ext cx="161574" cy="80101"/>
             </a:xfrm>
             <a:prstGeom prst="rect">
@@ -5352,7 +5352,7 @@
           </p:nvSpPr>
           <p:spPr>
             <a:xfrm>
-              <a:off x="3162750" y="5785772"/>
+              <a:off x="3162976" y="5785772"/>
               <a:ext cx="161574" cy="80101"/>
             </a:xfrm>
             <a:prstGeom prst="rect">
@@ -5398,7 +5398,7 @@
           </p:nvSpPr>
           <p:spPr>
             <a:xfrm>
-              <a:off x="4120281" y="5785772"/>
+              <a:off x="4120286" y="5785772"/>
               <a:ext cx="62179" cy="80101"/>
             </a:xfrm>
             <a:prstGeom prst="rect">
@@ -5444,7 +5444,7 @@
           </p:nvSpPr>
           <p:spPr>
             <a:xfrm>
-              <a:off x="4997024" y="5785772"/>
+              <a:off x="4996809" y="5785772"/>
               <a:ext cx="124358" cy="80101"/>
             </a:xfrm>
             <a:prstGeom prst="rect">
@@ -5490,7 +5490,7 @@
           </p:nvSpPr>
           <p:spPr>
             <a:xfrm>
-              <a:off x="5904858" y="5785772"/>
+              <a:off x="5904422" y="5785772"/>
               <a:ext cx="124358" cy="80101"/>
             </a:xfrm>
             <a:prstGeom prst="rect">
@@ -5536,7 +5536,7 @@
           </p:nvSpPr>
           <p:spPr>
             <a:xfrm>
-              <a:off x="6812691" y="5785772"/>
+              <a:off x="6812034" y="5785772"/>
               <a:ext cx="124358" cy="80101"/>
             </a:xfrm>
             <a:prstGeom prst="rect">
@@ -5582,7 +5582,7 @@
           </p:nvSpPr>
           <p:spPr>
             <a:xfrm>
-              <a:off x="7720525" y="5785772"/>
+              <a:off x="7719647" y="5785772"/>
               <a:ext cx="124358" cy="80101"/>
             </a:xfrm>
             <a:prstGeom prst="rect">
@@ -5753,7 +5753,7 @@
                   <a:latin typeface="Helvetica"/>
                   <a:cs typeface="Helvetica"/>
                 </a:rPr>
-                <a:t>subHR per 10 % decline: 1.44 (1.19-1.74), p_Bonf = &lt;0.001 (n = 6)  |  per IQR decline (Δ = 26.4 %): 2.63 (1.60-4.32)  |  IQR: [-11.1, 15.3] %</a:t>
+                <a:t>subHR per 10 % decline: 1.44 (1.19-1.73), p_Bonf = &lt;0.001 (n = 6)  |  per IQR decline (Δ = 26.4 %): 2.60 (1.58-4.26)  |  IQR: [-11.1, 15.4] %</a:t>
               </a:r>
             </a:p>
           </p:txBody>
